--- a/outputs/5537-albalink-slides.pptx
+++ b/outputs/5537-albalink-slides.pptx
@@ -3192,14 +3192,14 @@
           <a:noFill/>
         </p:spPr>
         <p:txBody>
-          <a:bodyPr wrap="square" lIns="45720" rIns="45720" tIns="18288" bIns="18288">
-            <a:spAutoFit/>
+          <a:bodyPr wrap="square" anchor="t" lIns="0" rIns="0" tIns="0" bIns="0">
+            <a:noAutofit/>
           </a:bodyPr>
           <a:lstStyle/>
           <a:p>
             <a:pPr algn="ctr"/>
             <a:r>
-              <a:rPr sz="5400" b="1">
+              <a:rPr sz="5400" b="1" i="0">
                 <a:solidFill>
                   <a:srgbClr val="1F4E78"/>
                 </a:solidFill>
@@ -3226,14 +3226,14 @@
           <a:noFill/>
         </p:spPr>
         <p:txBody>
-          <a:bodyPr wrap="square" lIns="45720" rIns="45720" tIns="18288" bIns="18288">
-            <a:spAutoFit/>
+          <a:bodyPr wrap="square" anchor="t" lIns="0" rIns="0" tIns="0" bIns="0">
+            <a:noAutofit/>
           </a:bodyPr>
           <a:lstStyle/>
           <a:p>
             <a:pPr algn="ctr"/>
             <a:r>
-              <a:rPr sz="2600" b="0">
+              <a:rPr sz="2600" b="0" i="0">
                 <a:solidFill>
                   <a:srgbClr val="202020"/>
                 </a:solidFill>
@@ -3260,14 +3260,14 @@
           <a:noFill/>
         </p:spPr>
         <p:txBody>
-          <a:bodyPr wrap="square" lIns="45720" rIns="45720" tIns="18288" bIns="18288">
-            <a:spAutoFit/>
+          <a:bodyPr wrap="square" anchor="t" lIns="0" rIns="0" tIns="0" bIns="0">
+            <a:noAutofit/>
           </a:bodyPr>
           <a:lstStyle/>
           <a:p>
             <a:pPr algn="ctr"/>
             <a:r>
-              <a:rPr sz="2600" b="0">
+              <a:rPr sz="2600" b="0" i="0">
                 <a:solidFill>
                   <a:srgbClr val="202020"/>
                 </a:solidFill>
@@ -3294,14 +3294,14 @@
           <a:noFill/>
         </p:spPr>
         <p:txBody>
-          <a:bodyPr wrap="square" lIns="45720" rIns="45720" tIns="18288" bIns="18288">
-            <a:spAutoFit/>
+          <a:bodyPr wrap="square" anchor="t" lIns="0" rIns="0" tIns="0" bIns="0">
+            <a:noAutofit/>
           </a:bodyPr>
           <a:lstStyle/>
           <a:p>
             <a:pPr algn="ctr"/>
             <a:r>
-              <a:rPr sz="2600" b="0">
+              <a:rPr sz="2600" b="0" i="0">
                 <a:solidFill>
                   <a:srgbClr val="202020"/>
                 </a:solidFill>
@@ -3328,14 +3328,14 @@
           <a:noFill/>
         </p:spPr>
         <p:txBody>
-          <a:bodyPr wrap="square" lIns="45720" rIns="45720" tIns="18288" bIns="18288">
-            <a:spAutoFit/>
+          <a:bodyPr wrap="square" anchor="t" lIns="0" rIns="0" tIns="0" bIns="0">
+            <a:noAutofit/>
           </a:bodyPr>
           <a:lstStyle/>
           <a:p>
             <a:pPr algn="ctr"/>
             <a:r>
-              <a:rPr sz="1800" b="0">
+              <a:rPr sz="1800" b="0" i="0">
                 <a:solidFill>
                   <a:srgbClr val="808080"/>
                 </a:solidFill>
@@ -3414,8 +3414,8 @@
         </p:nvSpPr>
         <p:spPr>
           <a:xfrm>
-            <a:off x="457200" y="457200"/>
-            <a:ext cx="11277295" cy="822960"/>
+            <a:off x="457200" y="365760"/>
+            <a:ext cx="11277295" cy="914400"/>
           </a:xfrm>
           <a:prstGeom prst="rect">
             <a:avLst/>
@@ -3423,14 +3423,14 @@
           <a:noFill/>
         </p:spPr>
         <p:txBody>
-          <a:bodyPr wrap="square" lIns="45720" rIns="45720" tIns="18288" bIns="18288">
-            <a:spAutoFit/>
+          <a:bodyPr wrap="square" anchor="ctr" lIns="0" rIns="0" tIns="0" bIns="0">
+            <a:noAutofit/>
           </a:bodyPr>
           <a:lstStyle/>
           <a:p>
             <a:pPr algn="l"/>
             <a:r>
-              <a:rPr sz="3000" b="1">
+              <a:rPr sz="2800" b="1" i="0">
                 <a:solidFill>
                   <a:srgbClr val="1F4E78"/>
                 </a:solidFill>
@@ -3448,8 +3448,8 @@
         </p:nvSpPr>
         <p:spPr>
           <a:xfrm>
-            <a:off x="457200" y="1234440"/>
-            <a:ext cx="1828800" cy="36576"/>
+            <a:off x="457200" y="1298448"/>
+            <a:ext cx="2194560" cy="36576"/>
           </a:xfrm>
           <a:prstGeom prst="rect">
             <a:avLst/>
@@ -3491,8 +3491,8 @@
         </p:nvSpPr>
         <p:spPr>
           <a:xfrm>
-            <a:off x="457200" y="1463040"/>
-            <a:ext cx="11277295" cy="640080"/>
+            <a:off x="457200" y="1508760"/>
+            <a:ext cx="11277295" cy="502920"/>
           </a:xfrm>
           <a:prstGeom prst="rect">
             <a:avLst/>
@@ -3500,14 +3500,14 @@
           <a:noFill/>
         </p:spPr>
         <p:txBody>
-          <a:bodyPr wrap="square" lIns="45720" rIns="45720" tIns="18288" bIns="18288">
-            <a:spAutoFit/>
+          <a:bodyPr wrap="square" anchor="ctr" lIns="0" rIns="0" tIns="0" bIns="0">
+            <a:noAutofit/>
           </a:bodyPr>
           <a:lstStyle/>
           <a:p>
             <a:pPr algn="l"/>
             <a:r>
-              <a:rPr sz="2200" b="1">
+              <a:rPr sz="2000" b="1" i="0">
                 <a:solidFill>
                   <a:srgbClr val="C0392B"/>
                 </a:solidFill>
@@ -3525,8 +3525,8 @@
         </p:nvSpPr>
         <p:spPr>
           <a:xfrm>
-            <a:off x="640080" y="2286000"/>
-            <a:ext cx="10911535" cy="4069080"/>
+            <a:off x="640080" y="2148840"/>
+            <a:ext cx="10911535" cy="4114800"/>
           </a:xfrm>
           <a:prstGeom prst="rect">
             <a:avLst/>
@@ -3534,15 +3534,18 @@
           <a:noFill/>
         </p:spPr>
         <p:txBody>
-          <a:bodyPr wrap="square" lIns="45720" rIns="45720">
-            <a:spAutoFit/>
+          <a:bodyPr wrap="square" anchor="t" lIns="0" rIns="0" tIns="0" bIns="0">
+            <a:noAutofit/>
           </a:bodyPr>
           <a:lstStyle/>
           <a:p>
             <a:pPr algn="l">
               <a:lnSpc>
-                <a:spcPct val="130000"/>
+                <a:spcPct val="135000"/>
               </a:lnSpc>
+              <a:spcAft>
+                <a:spcPts val="600"/>
+              </a:spcAft>
             </a:pPr>
             <a:r>
               <a:rPr sz="1800">
@@ -3556,8 +3559,11 @@
           <a:p>
             <a:pPr algn="l">
               <a:lnSpc>
-                <a:spcPct val="130000"/>
+                <a:spcPct val="135000"/>
               </a:lnSpc>
+              <a:spcAft>
+                <a:spcPts val="600"/>
+              </a:spcAft>
             </a:pPr>
             <a:r>
               <a:rPr sz="1800">
@@ -3571,8 +3577,11 @@
           <a:p>
             <a:pPr algn="l">
               <a:lnSpc>
-                <a:spcPct val="130000"/>
+                <a:spcPct val="135000"/>
               </a:lnSpc>
+              <a:spcAft>
+                <a:spcPts val="600"/>
+              </a:spcAft>
             </a:pPr>
             <a:r>
               <a:rPr sz="1800">
@@ -3586,8 +3595,11 @@
           <a:p>
             <a:pPr algn="l">
               <a:lnSpc>
-                <a:spcPct val="130000"/>
+                <a:spcPct val="135000"/>
               </a:lnSpc>
+              <a:spcAft>
+                <a:spcPts val="600"/>
+              </a:spcAft>
             </a:pPr>
             <a:r>
               <a:rPr sz="1800">
@@ -3626,8 +3638,8 @@
         </p:nvSpPr>
         <p:spPr>
           <a:xfrm>
-            <a:off x="457200" y="457200"/>
-            <a:ext cx="11277295" cy="822960"/>
+            <a:off x="457200" y="365760"/>
+            <a:ext cx="11277295" cy="914400"/>
           </a:xfrm>
           <a:prstGeom prst="rect">
             <a:avLst/>
@@ -3635,14 +3647,14 @@
           <a:noFill/>
         </p:spPr>
         <p:txBody>
-          <a:bodyPr wrap="square" lIns="45720" rIns="45720" tIns="18288" bIns="18288">
-            <a:spAutoFit/>
+          <a:bodyPr wrap="square" anchor="ctr" lIns="0" rIns="0" tIns="0" bIns="0">
+            <a:noAutofit/>
           </a:bodyPr>
           <a:lstStyle/>
           <a:p>
             <a:pPr algn="l"/>
             <a:r>
-              <a:rPr sz="3000" b="1">
+              <a:rPr sz="2800" b="1" i="0">
                 <a:solidFill>
                   <a:srgbClr val="1F4E78"/>
                 </a:solidFill>
@@ -3660,8 +3672,8 @@
         </p:nvSpPr>
         <p:spPr>
           <a:xfrm>
-            <a:off x="457200" y="1234440"/>
-            <a:ext cx="1828800" cy="36576"/>
+            <a:off x="457200" y="1298448"/>
+            <a:ext cx="2194560" cy="36576"/>
           </a:xfrm>
           <a:prstGeom prst="rect">
             <a:avLst/>
@@ -3703,8 +3715,8 @@
         </p:nvSpPr>
         <p:spPr>
           <a:xfrm>
-            <a:off x="457200" y="1463040"/>
-            <a:ext cx="11277295" cy="640080"/>
+            <a:off x="457200" y="1508760"/>
+            <a:ext cx="11277295" cy="502920"/>
           </a:xfrm>
           <a:prstGeom prst="rect">
             <a:avLst/>
@@ -3712,14 +3724,14 @@
           <a:noFill/>
         </p:spPr>
         <p:txBody>
-          <a:bodyPr wrap="square" lIns="45720" rIns="45720" tIns="18288" bIns="18288">
-            <a:spAutoFit/>
+          <a:bodyPr wrap="square" anchor="ctr" lIns="0" rIns="0" tIns="0" bIns="0">
+            <a:noAutofit/>
           </a:bodyPr>
           <a:lstStyle/>
           <a:p>
             <a:pPr algn="l"/>
             <a:r>
-              <a:rPr sz="2200" b="1">
+              <a:rPr sz="2000" b="1" i="0">
                 <a:solidFill>
                   <a:srgbClr val="C0392B"/>
                 </a:solidFill>
@@ -3737,8 +3749,8 @@
         </p:nvSpPr>
         <p:spPr>
           <a:xfrm>
-            <a:off x="640080" y="2286000"/>
-            <a:ext cx="10911535" cy="4069080"/>
+            <a:off x="640080" y="2148840"/>
+            <a:ext cx="10911535" cy="4114800"/>
           </a:xfrm>
           <a:prstGeom prst="rect">
             <a:avLst/>
@@ -3746,15 +3758,18 @@
           <a:noFill/>
         </p:spPr>
         <p:txBody>
-          <a:bodyPr wrap="square" lIns="45720" rIns="45720">
-            <a:spAutoFit/>
+          <a:bodyPr wrap="square" anchor="t" lIns="0" rIns="0" tIns="0" bIns="0">
+            <a:noAutofit/>
           </a:bodyPr>
           <a:lstStyle/>
           <a:p>
             <a:pPr algn="l">
               <a:lnSpc>
-                <a:spcPct val="130000"/>
+                <a:spcPct val="135000"/>
               </a:lnSpc>
+              <a:spcAft>
+                <a:spcPts val="600"/>
+              </a:spcAft>
             </a:pPr>
             <a:r>
               <a:rPr sz="1800">
@@ -3768,8 +3783,11 @@
           <a:p>
             <a:pPr algn="l">
               <a:lnSpc>
-                <a:spcPct val="130000"/>
+                <a:spcPct val="135000"/>
               </a:lnSpc>
+              <a:spcAft>
+                <a:spcPts val="600"/>
+              </a:spcAft>
             </a:pPr>
             <a:r>
               <a:rPr sz="1800">
@@ -3783,8 +3801,11 @@
           <a:p>
             <a:pPr algn="l">
               <a:lnSpc>
-                <a:spcPct val="130000"/>
+                <a:spcPct val="135000"/>
               </a:lnSpc>
+              <a:spcAft>
+                <a:spcPts val="600"/>
+              </a:spcAft>
             </a:pPr>
             <a:r>
               <a:rPr sz="1800">
@@ -3798,8 +3819,11 @@
           <a:p>
             <a:pPr algn="l">
               <a:lnSpc>
-                <a:spcPct val="130000"/>
+                <a:spcPct val="135000"/>
               </a:lnSpc>
+              <a:spcAft>
+                <a:spcPts val="600"/>
+              </a:spcAft>
             </a:pPr>
             <a:r>
               <a:rPr sz="1800">
@@ -3838,8 +3862,8 @@
         </p:nvSpPr>
         <p:spPr>
           <a:xfrm>
-            <a:off x="457200" y="457200"/>
-            <a:ext cx="11277295" cy="822960"/>
+            <a:off x="457200" y="365760"/>
+            <a:ext cx="11277295" cy="914400"/>
           </a:xfrm>
           <a:prstGeom prst="rect">
             <a:avLst/>
@@ -3847,14 +3871,14 @@
           <a:noFill/>
         </p:spPr>
         <p:txBody>
-          <a:bodyPr wrap="square" lIns="45720" rIns="45720" tIns="18288" bIns="18288">
-            <a:spAutoFit/>
+          <a:bodyPr wrap="square" anchor="ctr" lIns="0" rIns="0" tIns="0" bIns="0">
+            <a:noAutofit/>
           </a:bodyPr>
           <a:lstStyle/>
           <a:p>
             <a:pPr algn="l"/>
             <a:r>
-              <a:rPr sz="3000" b="1">
+              <a:rPr sz="2800" b="1" i="0">
                 <a:solidFill>
                   <a:srgbClr val="1F4E78"/>
                 </a:solidFill>
@@ -3872,8 +3896,8 @@
         </p:nvSpPr>
         <p:spPr>
           <a:xfrm>
-            <a:off x="457200" y="1234440"/>
-            <a:ext cx="1828800" cy="36576"/>
+            <a:off x="457200" y="1298448"/>
+            <a:ext cx="2194560" cy="36576"/>
           </a:xfrm>
           <a:prstGeom prst="rect">
             <a:avLst/>
@@ -3915,8 +3939,8 @@
         </p:nvSpPr>
         <p:spPr>
           <a:xfrm>
-            <a:off x="457200" y="1463040"/>
-            <a:ext cx="11277295" cy="640080"/>
+            <a:off x="457200" y="1508760"/>
+            <a:ext cx="11277295" cy="502920"/>
           </a:xfrm>
           <a:prstGeom prst="rect">
             <a:avLst/>
@@ -3924,14 +3948,14 @@
           <a:noFill/>
         </p:spPr>
         <p:txBody>
-          <a:bodyPr wrap="square" lIns="45720" rIns="45720" tIns="18288" bIns="18288">
-            <a:spAutoFit/>
+          <a:bodyPr wrap="square" anchor="ctr" lIns="0" rIns="0" tIns="0" bIns="0">
+            <a:noAutofit/>
           </a:bodyPr>
           <a:lstStyle/>
           <a:p>
             <a:pPr algn="l"/>
             <a:r>
-              <a:rPr sz="2200" b="1">
+              <a:rPr sz="2000" b="1" i="0">
                 <a:solidFill>
                   <a:srgbClr val="C0392B"/>
                 </a:solidFill>
@@ -3950,7 +3974,7 @@
           <p:nvPr/>
         </p:nvGraphicFramePr>
         <p:xfrm>
-          <a:off x="457200" y="2286000"/>
+          <a:off x="457200" y="2148840"/>
           <a:ext cx="11277295" cy="1371600"/>
         </p:xfrm>
         <a:graphic>
@@ -4131,8 +4155,8 @@
         </p:nvSpPr>
         <p:spPr>
           <a:xfrm>
-            <a:off x="457200" y="457200"/>
-            <a:ext cx="11277295" cy="822960"/>
+            <a:off x="457200" y="365760"/>
+            <a:ext cx="11277295" cy="914400"/>
           </a:xfrm>
           <a:prstGeom prst="rect">
             <a:avLst/>
@@ -4140,14 +4164,14 @@
           <a:noFill/>
         </p:spPr>
         <p:txBody>
-          <a:bodyPr wrap="square" lIns="45720" rIns="45720" tIns="18288" bIns="18288">
-            <a:spAutoFit/>
+          <a:bodyPr wrap="square" anchor="ctr" lIns="0" rIns="0" tIns="0" bIns="0">
+            <a:noAutofit/>
           </a:bodyPr>
           <a:lstStyle/>
           <a:p>
             <a:pPr algn="l"/>
             <a:r>
-              <a:rPr sz="3000" b="1">
+              <a:rPr sz="2800" b="1" i="0">
                 <a:solidFill>
                   <a:srgbClr val="1F4E78"/>
                 </a:solidFill>
@@ -4165,8 +4189,8 @@
         </p:nvSpPr>
         <p:spPr>
           <a:xfrm>
-            <a:off x="457200" y="1234440"/>
-            <a:ext cx="1828800" cy="36576"/>
+            <a:off x="457200" y="1298448"/>
+            <a:ext cx="2194560" cy="36576"/>
           </a:xfrm>
           <a:prstGeom prst="rect">
             <a:avLst/>
@@ -4208,8 +4232,8 @@
         </p:nvSpPr>
         <p:spPr>
           <a:xfrm>
-            <a:off x="457200" y="1463040"/>
-            <a:ext cx="11277295" cy="640080"/>
+            <a:off x="457200" y="1508760"/>
+            <a:ext cx="11277295" cy="502920"/>
           </a:xfrm>
           <a:prstGeom prst="rect">
             <a:avLst/>
@@ -4217,14 +4241,14 @@
           <a:noFill/>
         </p:spPr>
         <p:txBody>
-          <a:bodyPr wrap="square" lIns="45720" rIns="45720" tIns="18288" bIns="18288">
-            <a:spAutoFit/>
+          <a:bodyPr wrap="square" anchor="ctr" lIns="0" rIns="0" tIns="0" bIns="0">
+            <a:noAutofit/>
           </a:bodyPr>
           <a:lstStyle/>
           <a:p>
             <a:pPr algn="l"/>
             <a:r>
-              <a:rPr sz="2200" b="1">
+              <a:rPr sz="2000" b="1" i="0">
                 <a:solidFill>
                   <a:srgbClr val="C0392B"/>
                 </a:solidFill>
@@ -4242,8 +4266,8 @@
         </p:nvSpPr>
         <p:spPr>
           <a:xfrm>
-            <a:off x="640080" y="2286000"/>
-            <a:ext cx="10911535" cy="4069080"/>
+            <a:off x="640080" y="2148840"/>
+            <a:ext cx="10911535" cy="4114800"/>
           </a:xfrm>
           <a:prstGeom prst="rect">
             <a:avLst/>
@@ -4251,15 +4275,18 @@
           <a:noFill/>
         </p:spPr>
         <p:txBody>
-          <a:bodyPr wrap="square" lIns="45720" rIns="45720">
-            <a:spAutoFit/>
+          <a:bodyPr wrap="square" anchor="t" lIns="0" rIns="0" tIns="0" bIns="0">
+            <a:noAutofit/>
           </a:bodyPr>
           <a:lstStyle/>
           <a:p>
             <a:pPr algn="l">
               <a:lnSpc>
-                <a:spcPct val="130000"/>
+                <a:spcPct val="135000"/>
               </a:lnSpc>
+              <a:spcAft>
+                <a:spcPts val="600"/>
+              </a:spcAft>
             </a:pPr>
             <a:r>
               <a:rPr sz="1800">
@@ -4273,8 +4300,11 @@
           <a:p>
             <a:pPr algn="l">
               <a:lnSpc>
-                <a:spcPct val="130000"/>
+                <a:spcPct val="135000"/>
               </a:lnSpc>
+              <a:spcAft>
+                <a:spcPts val="600"/>
+              </a:spcAft>
             </a:pPr>
             <a:r>
               <a:rPr sz="1800">
@@ -4288,8 +4318,11 @@
           <a:p>
             <a:pPr algn="l">
               <a:lnSpc>
-                <a:spcPct val="130000"/>
+                <a:spcPct val="135000"/>
               </a:lnSpc>
+              <a:spcAft>
+                <a:spcPts val="600"/>
+              </a:spcAft>
             </a:pPr>
             <a:r>
               <a:rPr sz="1800">
@@ -4303,8 +4336,11 @@
           <a:p>
             <a:pPr algn="l">
               <a:lnSpc>
-                <a:spcPct val="130000"/>
+                <a:spcPct val="135000"/>
               </a:lnSpc>
+              <a:spcAft>
+                <a:spcPts val="600"/>
+              </a:spcAft>
             </a:pPr>
             <a:r>
               <a:rPr sz="1800">
@@ -4343,8 +4379,8 @@
         </p:nvSpPr>
         <p:spPr>
           <a:xfrm>
-            <a:off x="457200" y="457200"/>
-            <a:ext cx="11277295" cy="822960"/>
+            <a:off x="457200" y="365760"/>
+            <a:ext cx="11277295" cy="914400"/>
           </a:xfrm>
           <a:prstGeom prst="rect">
             <a:avLst/>
@@ -4352,14 +4388,14 @@
           <a:noFill/>
         </p:spPr>
         <p:txBody>
-          <a:bodyPr wrap="square" lIns="45720" rIns="45720" tIns="18288" bIns="18288">
-            <a:spAutoFit/>
+          <a:bodyPr wrap="square" anchor="ctr" lIns="0" rIns="0" tIns="0" bIns="0">
+            <a:noAutofit/>
           </a:bodyPr>
           <a:lstStyle/>
           <a:p>
             <a:pPr algn="l"/>
             <a:r>
-              <a:rPr sz="3000" b="1">
+              <a:rPr sz="2800" b="1" i="0">
                 <a:solidFill>
                   <a:srgbClr val="1F4E78"/>
                 </a:solidFill>
@@ -4377,8 +4413,8 @@
         </p:nvSpPr>
         <p:spPr>
           <a:xfrm>
-            <a:off x="457200" y="1234440"/>
-            <a:ext cx="1828800" cy="36576"/>
+            <a:off x="457200" y="1298448"/>
+            <a:ext cx="2194560" cy="36576"/>
           </a:xfrm>
           <a:prstGeom prst="rect">
             <a:avLst/>
@@ -4420,8 +4456,8 @@
         </p:nvSpPr>
         <p:spPr>
           <a:xfrm>
-            <a:off x="457200" y="1463040"/>
-            <a:ext cx="11277295" cy="640080"/>
+            <a:off x="457200" y="1508760"/>
+            <a:ext cx="11277295" cy="502920"/>
           </a:xfrm>
           <a:prstGeom prst="rect">
             <a:avLst/>
@@ -4429,14 +4465,14 @@
           <a:noFill/>
         </p:spPr>
         <p:txBody>
-          <a:bodyPr wrap="square" lIns="45720" rIns="45720" tIns="18288" bIns="18288">
-            <a:spAutoFit/>
+          <a:bodyPr wrap="square" anchor="ctr" lIns="0" rIns="0" tIns="0" bIns="0">
+            <a:noAutofit/>
           </a:bodyPr>
           <a:lstStyle/>
           <a:p>
             <a:pPr algn="l"/>
             <a:r>
-              <a:rPr sz="2200" b="1">
+              <a:rPr sz="2000" b="1" i="0">
                 <a:solidFill>
                   <a:srgbClr val="C0392B"/>
                 </a:solidFill>
@@ -4454,8 +4490,8 @@
         </p:nvSpPr>
         <p:spPr>
           <a:xfrm>
-            <a:off x="1371600" y="2286000"/>
-            <a:ext cx="9448495" cy="3794760"/>
+            <a:off x="1371600" y="2148840"/>
+            <a:ext cx="9448495" cy="3931920"/>
           </a:xfrm>
           <a:prstGeom prst="rect">
             <a:avLst/>
@@ -4484,7 +4520,9 @@
           </a:fontRef>
         </p:style>
         <p:txBody>
-          <a:bodyPr rtlCol="0" anchor="ctr" wrap="square" lIns="274320" rIns="274320" tIns="365760"/>
+          <a:bodyPr rtlCol="0" anchor="ctr" wrap="square" lIns="274320" rIns="274320" tIns="365760">
+            <a:noAutofit/>
+          </a:bodyPr>
           <a:lstStyle/>
           <a:p>
             <a:pPr algn="ctr"/>
@@ -4556,8 +4594,8 @@
         </p:nvSpPr>
         <p:spPr>
           <a:xfrm>
-            <a:off x="457200" y="457200"/>
-            <a:ext cx="11277295" cy="822960"/>
+            <a:off x="457200" y="365760"/>
+            <a:ext cx="11277295" cy="914400"/>
           </a:xfrm>
           <a:prstGeom prst="rect">
             <a:avLst/>
@@ -4565,14 +4603,14 @@
           <a:noFill/>
         </p:spPr>
         <p:txBody>
-          <a:bodyPr wrap="square" lIns="45720" rIns="45720" tIns="18288" bIns="18288">
-            <a:spAutoFit/>
+          <a:bodyPr wrap="square" anchor="ctr" lIns="0" rIns="0" tIns="0" bIns="0">
+            <a:noAutofit/>
           </a:bodyPr>
           <a:lstStyle/>
           <a:p>
             <a:pPr algn="l"/>
             <a:r>
-              <a:rPr sz="3000" b="1">
+              <a:rPr sz="2800" b="1" i="0">
                 <a:solidFill>
                   <a:srgbClr val="1F4E78"/>
                 </a:solidFill>
@@ -4590,8 +4628,8 @@
         </p:nvSpPr>
         <p:spPr>
           <a:xfrm>
-            <a:off x="457200" y="1234440"/>
-            <a:ext cx="1828800" cy="36576"/>
+            <a:off x="457200" y="1298448"/>
+            <a:ext cx="2194560" cy="36576"/>
           </a:xfrm>
           <a:prstGeom prst="rect">
             <a:avLst/>
@@ -4633,8 +4671,8 @@
         </p:nvSpPr>
         <p:spPr>
           <a:xfrm>
-            <a:off x="822960" y="1463040"/>
-            <a:ext cx="10545775" cy="4892040"/>
+            <a:off x="822960" y="2148840"/>
+            <a:ext cx="10545775" cy="4114800"/>
           </a:xfrm>
           <a:prstGeom prst="rect">
             <a:avLst/>
@@ -4642,15 +4680,18 @@
           <a:noFill/>
         </p:spPr>
         <p:txBody>
-          <a:bodyPr wrap="square" lIns="45720" rIns="45720">
-            <a:spAutoFit/>
+          <a:bodyPr wrap="square" anchor="t" lIns="0" rIns="0" tIns="0" bIns="0">
+            <a:noAutofit/>
           </a:bodyPr>
           <a:lstStyle/>
           <a:p>
             <a:pPr algn="l">
               <a:lnSpc>
-                <a:spcPct val="130000"/>
+                <a:spcPct val="135000"/>
               </a:lnSpc>
+              <a:spcAft>
+                <a:spcPts val="600"/>
+              </a:spcAft>
             </a:pPr>
             <a:r>
               <a:rPr sz="2200">
@@ -4741,14 +4782,14 @@
           <a:noFill/>
         </p:spPr>
         <p:txBody>
-          <a:bodyPr wrap="square" lIns="45720" rIns="45720" tIns="18288" bIns="18288">
-            <a:spAutoFit/>
+          <a:bodyPr wrap="square" anchor="ctr" lIns="0" rIns="0" tIns="0" bIns="0">
+            <a:noAutofit/>
           </a:bodyPr>
           <a:lstStyle/>
           <a:p>
             <a:pPr algn="ctr"/>
             <a:r>
-              <a:rPr sz="5800" b="1">
+              <a:rPr sz="5800" b="1" i="0">
                 <a:solidFill>
                   <a:srgbClr val="FFFFFF"/>
                 </a:solidFill>
@@ -4784,8 +4825,8 @@
         </p:nvSpPr>
         <p:spPr>
           <a:xfrm>
-            <a:off x="457200" y="457200"/>
-            <a:ext cx="11277295" cy="822960"/>
+            <a:off x="457200" y="365760"/>
+            <a:ext cx="11277295" cy="914400"/>
           </a:xfrm>
           <a:prstGeom prst="rect">
             <a:avLst/>
@@ -4793,14 +4834,14 @@
           <a:noFill/>
         </p:spPr>
         <p:txBody>
-          <a:bodyPr wrap="square" lIns="45720" rIns="45720" tIns="18288" bIns="18288">
-            <a:spAutoFit/>
+          <a:bodyPr wrap="square" anchor="ctr" lIns="0" rIns="0" tIns="0" bIns="0">
+            <a:noAutofit/>
           </a:bodyPr>
           <a:lstStyle/>
           <a:p>
             <a:pPr algn="l"/>
             <a:r>
-              <a:rPr sz="3000" b="1">
+              <a:rPr sz="2800" b="1" i="0">
                 <a:solidFill>
                   <a:srgbClr val="1F4E78"/>
                 </a:solidFill>
@@ -4818,8 +4859,8 @@
         </p:nvSpPr>
         <p:spPr>
           <a:xfrm>
-            <a:off x="457200" y="1234440"/>
-            <a:ext cx="1828800" cy="36576"/>
+            <a:off x="457200" y="1298448"/>
+            <a:ext cx="2194560" cy="36576"/>
           </a:xfrm>
           <a:prstGeom prst="rect">
             <a:avLst/>
@@ -4861,8 +4902,8 @@
         </p:nvSpPr>
         <p:spPr>
           <a:xfrm>
-            <a:off x="457200" y="1463040"/>
-            <a:ext cx="11277295" cy="640080"/>
+            <a:off x="457200" y="1508760"/>
+            <a:ext cx="11277295" cy="502920"/>
           </a:xfrm>
           <a:prstGeom prst="rect">
             <a:avLst/>
@@ -4870,14 +4911,14 @@
           <a:noFill/>
         </p:spPr>
         <p:txBody>
-          <a:bodyPr wrap="square" lIns="45720" rIns="45720" tIns="18288" bIns="18288">
-            <a:spAutoFit/>
+          <a:bodyPr wrap="square" anchor="ctr" lIns="0" rIns="0" tIns="0" bIns="0">
+            <a:noAutofit/>
           </a:bodyPr>
           <a:lstStyle/>
           <a:p>
             <a:pPr algn="l"/>
             <a:r>
-              <a:rPr sz="2200" b="1">
+              <a:rPr sz="2000" b="1" i="0">
                 <a:solidFill>
                   <a:srgbClr val="C0392B"/>
                 </a:solidFill>
@@ -4895,8 +4936,8 @@
         </p:nvSpPr>
         <p:spPr>
           <a:xfrm>
-            <a:off x="640080" y="2286000"/>
-            <a:ext cx="10911535" cy="4069080"/>
+            <a:off x="640080" y="2148840"/>
+            <a:ext cx="10911535" cy="4114800"/>
           </a:xfrm>
           <a:prstGeom prst="rect">
             <a:avLst/>
@@ -4904,15 +4945,18 @@
           <a:noFill/>
         </p:spPr>
         <p:txBody>
-          <a:bodyPr wrap="square" lIns="45720" rIns="45720">
-            <a:spAutoFit/>
+          <a:bodyPr wrap="square" anchor="t" lIns="0" rIns="0" tIns="0" bIns="0">
+            <a:noAutofit/>
           </a:bodyPr>
           <a:lstStyle/>
           <a:p>
             <a:pPr algn="l">
               <a:lnSpc>
-                <a:spcPct val="130000"/>
+                <a:spcPct val="135000"/>
               </a:lnSpc>
+              <a:spcAft>
+                <a:spcPts val="600"/>
+              </a:spcAft>
             </a:pPr>
             <a:r>
               <a:rPr sz="1800">
@@ -4926,8 +4970,11 @@
           <a:p>
             <a:pPr algn="l">
               <a:lnSpc>
-                <a:spcPct val="130000"/>
+                <a:spcPct val="135000"/>
               </a:lnSpc>
+              <a:spcAft>
+                <a:spcPts val="600"/>
+              </a:spcAft>
             </a:pPr>
             <a:r>
               <a:rPr sz="1800">
@@ -4941,8 +4988,11 @@
           <a:p>
             <a:pPr algn="l">
               <a:lnSpc>
-                <a:spcPct val="130000"/>
+                <a:spcPct val="135000"/>
               </a:lnSpc>
+              <a:spcAft>
+                <a:spcPts val="600"/>
+              </a:spcAft>
             </a:pPr>
             <a:r>
               <a:rPr sz="1800">
@@ -4981,8 +5031,8 @@
         </p:nvSpPr>
         <p:spPr>
           <a:xfrm>
-            <a:off x="457200" y="457200"/>
-            <a:ext cx="11277295" cy="822960"/>
+            <a:off x="457200" y="365760"/>
+            <a:ext cx="11277295" cy="914400"/>
           </a:xfrm>
           <a:prstGeom prst="rect">
             <a:avLst/>
@@ -4990,14 +5040,14 @@
           <a:noFill/>
         </p:spPr>
         <p:txBody>
-          <a:bodyPr wrap="square" lIns="45720" rIns="45720" tIns="18288" bIns="18288">
-            <a:spAutoFit/>
+          <a:bodyPr wrap="square" anchor="ctr" lIns="0" rIns="0" tIns="0" bIns="0">
+            <a:noAutofit/>
           </a:bodyPr>
           <a:lstStyle/>
           <a:p>
             <a:pPr algn="l"/>
             <a:r>
-              <a:rPr sz="3000" b="1">
+              <a:rPr sz="2800" b="1" i="0">
                 <a:solidFill>
                   <a:srgbClr val="1F4E78"/>
                 </a:solidFill>
@@ -5015,8 +5065,8 @@
         </p:nvSpPr>
         <p:spPr>
           <a:xfrm>
-            <a:off x="457200" y="1234440"/>
-            <a:ext cx="1828800" cy="36576"/>
+            <a:off x="457200" y="1298448"/>
+            <a:ext cx="2194560" cy="36576"/>
           </a:xfrm>
           <a:prstGeom prst="rect">
             <a:avLst/>
@@ -5058,8 +5108,8 @@
         </p:nvSpPr>
         <p:spPr>
           <a:xfrm>
-            <a:off x="457200" y="1463040"/>
-            <a:ext cx="11277295" cy="640080"/>
+            <a:off x="457200" y="1508760"/>
+            <a:ext cx="11277295" cy="502920"/>
           </a:xfrm>
           <a:prstGeom prst="rect">
             <a:avLst/>
@@ -5067,14 +5117,14 @@
           <a:noFill/>
         </p:spPr>
         <p:txBody>
-          <a:bodyPr wrap="square" lIns="45720" rIns="45720" tIns="18288" bIns="18288">
-            <a:spAutoFit/>
+          <a:bodyPr wrap="square" anchor="ctr" lIns="0" rIns="0" tIns="0" bIns="0">
+            <a:noAutofit/>
           </a:bodyPr>
           <a:lstStyle/>
           <a:p>
             <a:pPr algn="l"/>
             <a:r>
-              <a:rPr sz="2200" b="1">
+              <a:rPr sz="2000" b="1" i="0">
                 <a:solidFill>
                   <a:srgbClr val="C0392B"/>
                 </a:solidFill>
@@ -5092,8 +5142,8 @@
         </p:nvSpPr>
         <p:spPr>
           <a:xfrm>
-            <a:off x="640080" y="2286000"/>
-            <a:ext cx="10911535" cy="4069080"/>
+            <a:off x="640080" y="2148840"/>
+            <a:ext cx="10911535" cy="4114800"/>
           </a:xfrm>
           <a:prstGeom prst="rect">
             <a:avLst/>
@@ -5101,15 +5151,18 @@
           <a:noFill/>
         </p:spPr>
         <p:txBody>
-          <a:bodyPr wrap="square" lIns="45720" rIns="45720">
-            <a:spAutoFit/>
+          <a:bodyPr wrap="square" anchor="t" lIns="0" rIns="0" tIns="0" bIns="0">
+            <a:noAutofit/>
           </a:bodyPr>
           <a:lstStyle/>
           <a:p>
             <a:pPr algn="l">
               <a:lnSpc>
-                <a:spcPct val="130000"/>
+                <a:spcPct val="135000"/>
               </a:lnSpc>
+              <a:spcAft>
+                <a:spcPts val="600"/>
+              </a:spcAft>
             </a:pPr>
             <a:r>
               <a:rPr sz="1800">
@@ -5123,8 +5176,11 @@
           <a:p>
             <a:pPr algn="l">
               <a:lnSpc>
-                <a:spcPct val="130000"/>
+                <a:spcPct val="135000"/>
               </a:lnSpc>
+              <a:spcAft>
+                <a:spcPts val="600"/>
+              </a:spcAft>
             </a:pPr>
             <a:r>
               <a:rPr sz="1800">
@@ -5138,8 +5194,11 @@
           <a:p>
             <a:pPr algn="l">
               <a:lnSpc>
-                <a:spcPct val="130000"/>
+                <a:spcPct val="135000"/>
               </a:lnSpc>
+              <a:spcAft>
+                <a:spcPts val="600"/>
+              </a:spcAft>
             </a:pPr>
             <a:r>
               <a:rPr sz="1800">
@@ -5153,8 +5212,11 @@
           <a:p>
             <a:pPr algn="l">
               <a:lnSpc>
-                <a:spcPct val="130000"/>
+                <a:spcPct val="135000"/>
               </a:lnSpc>
+              <a:spcAft>
+                <a:spcPts val="600"/>
+              </a:spcAft>
             </a:pPr>
             <a:r>
               <a:rPr sz="1800">
@@ -5168,8 +5230,11 @@
           <a:p>
             <a:pPr algn="l">
               <a:lnSpc>
-                <a:spcPct val="130000"/>
+                <a:spcPct val="135000"/>
               </a:lnSpc>
+              <a:spcAft>
+                <a:spcPts val="600"/>
+              </a:spcAft>
             </a:pPr>
             <a:r>
               <a:rPr sz="1800">
@@ -5208,8 +5273,8 @@
         </p:nvSpPr>
         <p:spPr>
           <a:xfrm>
-            <a:off x="457200" y="457200"/>
-            <a:ext cx="11277295" cy="822960"/>
+            <a:off x="457200" y="365760"/>
+            <a:ext cx="11277295" cy="914400"/>
           </a:xfrm>
           <a:prstGeom prst="rect">
             <a:avLst/>
@@ -5217,14 +5282,14 @@
           <a:noFill/>
         </p:spPr>
         <p:txBody>
-          <a:bodyPr wrap="square" lIns="45720" rIns="45720" tIns="18288" bIns="18288">
-            <a:spAutoFit/>
+          <a:bodyPr wrap="square" anchor="ctr" lIns="0" rIns="0" tIns="0" bIns="0">
+            <a:noAutofit/>
           </a:bodyPr>
           <a:lstStyle/>
           <a:p>
             <a:pPr algn="l"/>
             <a:r>
-              <a:rPr sz="3000" b="1">
+              <a:rPr sz="2800" b="1" i="0">
                 <a:solidFill>
                   <a:srgbClr val="1F4E78"/>
                 </a:solidFill>
@@ -5242,8 +5307,8 @@
         </p:nvSpPr>
         <p:spPr>
           <a:xfrm>
-            <a:off x="457200" y="1234440"/>
-            <a:ext cx="1828800" cy="36576"/>
+            <a:off x="457200" y="1298448"/>
+            <a:ext cx="2194560" cy="36576"/>
           </a:xfrm>
           <a:prstGeom prst="rect">
             <a:avLst/>
@@ -5285,8 +5350,8 @@
         </p:nvSpPr>
         <p:spPr>
           <a:xfrm>
-            <a:off x="457200" y="1463040"/>
-            <a:ext cx="11277295" cy="640080"/>
+            <a:off x="457200" y="1508760"/>
+            <a:ext cx="11277295" cy="502920"/>
           </a:xfrm>
           <a:prstGeom prst="rect">
             <a:avLst/>
@@ -5294,14 +5359,14 @@
           <a:noFill/>
         </p:spPr>
         <p:txBody>
-          <a:bodyPr wrap="square" lIns="45720" rIns="45720" tIns="18288" bIns="18288">
-            <a:spAutoFit/>
+          <a:bodyPr wrap="square" anchor="ctr" lIns="0" rIns="0" tIns="0" bIns="0">
+            <a:noAutofit/>
           </a:bodyPr>
           <a:lstStyle/>
           <a:p>
             <a:pPr algn="l"/>
             <a:r>
-              <a:rPr sz="2200" b="1">
+              <a:rPr sz="2000" b="1" i="0">
                 <a:solidFill>
                   <a:srgbClr val="C0392B"/>
                 </a:solidFill>
@@ -5319,8 +5384,8 @@
         </p:nvSpPr>
         <p:spPr>
           <a:xfrm>
-            <a:off x="640080" y="2286000"/>
-            <a:ext cx="10911535" cy="4069080"/>
+            <a:off x="640080" y="2148840"/>
+            <a:ext cx="10911535" cy="4114800"/>
           </a:xfrm>
           <a:prstGeom prst="rect">
             <a:avLst/>
@@ -5328,15 +5393,18 @@
           <a:noFill/>
         </p:spPr>
         <p:txBody>
-          <a:bodyPr wrap="square" lIns="45720" rIns="45720">
-            <a:spAutoFit/>
+          <a:bodyPr wrap="square" anchor="t" lIns="0" rIns="0" tIns="0" bIns="0">
+            <a:noAutofit/>
           </a:bodyPr>
           <a:lstStyle/>
           <a:p>
             <a:pPr algn="l">
               <a:lnSpc>
-                <a:spcPct val="130000"/>
+                <a:spcPct val="135000"/>
               </a:lnSpc>
+              <a:spcAft>
+                <a:spcPts val="600"/>
+              </a:spcAft>
             </a:pPr>
             <a:r>
               <a:rPr sz="1800">
@@ -5350,8 +5418,11 @@
           <a:p>
             <a:pPr algn="l">
               <a:lnSpc>
-                <a:spcPct val="130000"/>
+                <a:spcPct val="135000"/>
               </a:lnSpc>
+              <a:spcAft>
+                <a:spcPts val="600"/>
+              </a:spcAft>
             </a:pPr>
             <a:r>
               <a:rPr sz="1800">
@@ -5365,8 +5436,11 @@
           <a:p>
             <a:pPr algn="l">
               <a:lnSpc>
-                <a:spcPct val="130000"/>
+                <a:spcPct val="135000"/>
               </a:lnSpc>
+              <a:spcAft>
+                <a:spcPts val="600"/>
+              </a:spcAft>
             </a:pPr>
             <a:r>
               <a:rPr sz="1800">
@@ -5405,8 +5479,8 @@
         </p:nvSpPr>
         <p:spPr>
           <a:xfrm>
-            <a:off x="457200" y="457200"/>
-            <a:ext cx="11277295" cy="822960"/>
+            <a:off x="457200" y="365760"/>
+            <a:ext cx="11277295" cy="914400"/>
           </a:xfrm>
           <a:prstGeom prst="rect">
             <a:avLst/>
@@ -5414,14 +5488,14 @@
           <a:noFill/>
         </p:spPr>
         <p:txBody>
-          <a:bodyPr wrap="square" lIns="45720" rIns="45720" tIns="18288" bIns="18288">
-            <a:spAutoFit/>
+          <a:bodyPr wrap="square" anchor="ctr" lIns="0" rIns="0" tIns="0" bIns="0">
+            <a:noAutofit/>
           </a:bodyPr>
           <a:lstStyle/>
           <a:p>
             <a:pPr algn="l"/>
             <a:r>
-              <a:rPr sz="3000" b="1">
+              <a:rPr sz="2800" b="1" i="0">
                 <a:solidFill>
                   <a:srgbClr val="1F4E78"/>
                 </a:solidFill>
@@ -5439,8 +5513,8 @@
         </p:nvSpPr>
         <p:spPr>
           <a:xfrm>
-            <a:off x="457200" y="1234440"/>
-            <a:ext cx="1828800" cy="36576"/>
+            <a:off x="457200" y="1298448"/>
+            <a:ext cx="2194560" cy="36576"/>
           </a:xfrm>
           <a:prstGeom prst="rect">
             <a:avLst/>
@@ -5482,8 +5556,8 @@
         </p:nvSpPr>
         <p:spPr>
           <a:xfrm>
-            <a:off x="457200" y="1463040"/>
-            <a:ext cx="11277295" cy="640080"/>
+            <a:off x="457200" y="1508760"/>
+            <a:ext cx="11277295" cy="502920"/>
           </a:xfrm>
           <a:prstGeom prst="rect">
             <a:avLst/>
@@ -5491,14 +5565,14 @@
           <a:noFill/>
         </p:spPr>
         <p:txBody>
-          <a:bodyPr wrap="square" lIns="45720" rIns="45720" tIns="18288" bIns="18288">
-            <a:spAutoFit/>
+          <a:bodyPr wrap="square" anchor="ctr" lIns="0" rIns="0" tIns="0" bIns="0">
+            <a:noAutofit/>
           </a:bodyPr>
           <a:lstStyle/>
           <a:p>
             <a:pPr algn="l"/>
             <a:r>
-              <a:rPr sz="2200" b="1">
+              <a:rPr sz="2000" b="1" i="0">
                 <a:solidFill>
                   <a:srgbClr val="C0392B"/>
                 </a:solidFill>
@@ -5516,8 +5590,8 @@
         </p:nvSpPr>
         <p:spPr>
           <a:xfrm>
-            <a:off x="640080" y="2286000"/>
-            <a:ext cx="10911535" cy="4069080"/>
+            <a:off x="640080" y="2148840"/>
+            <a:ext cx="10911535" cy="4114800"/>
           </a:xfrm>
           <a:prstGeom prst="rect">
             <a:avLst/>
@@ -5525,15 +5599,18 @@
           <a:noFill/>
         </p:spPr>
         <p:txBody>
-          <a:bodyPr wrap="square" lIns="45720" rIns="45720">
-            <a:spAutoFit/>
+          <a:bodyPr wrap="square" anchor="t" lIns="0" rIns="0" tIns="0" bIns="0">
+            <a:noAutofit/>
           </a:bodyPr>
           <a:lstStyle/>
           <a:p>
             <a:pPr algn="l">
               <a:lnSpc>
-                <a:spcPct val="130000"/>
+                <a:spcPct val="135000"/>
               </a:lnSpc>
+              <a:spcAft>
+                <a:spcPts val="600"/>
+              </a:spcAft>
             </a:pPr>
             <a:r>
               <a:rPr sz="1800">
@@ -5547,8 +5624,11 @@
           <a:p>
             <a:pPr algn="l">
               <a:lnSpc>
-                <a:spcPct val="130000"/>
+                <a:spcPct val="135000"/>
               </a:lnSpc>
+              <a:spcAft>
+                <a:spcPts val="600"/>
+              </a:spcAft>
             </a:pPr>
             <a:r>
               <a:rPr sz="1800">
@@ -5562,8 +5642,11 @@
           <a:p>
             <a:pPr algn="l">
               <a:lnSpc>
-                <a:spcPct val="130000"/>
+                <a:spcPct val="135000"/>
               </a:lnSpc>
+              <a:spcAft>
+                <a:spcPts val="600"/>
+              </a:spcAft>
             </a:pPr>
             <a:r>
               <a:rPr sz="1800">
@@ -5577,8 +5660,11 @@
           <a:p>
             <a:pPr algn="l">
               <a:lnSpc>
-                <a:spcPct val="130000"/>
+                <a:spcPct val="135000"/>
               </a:lnSpc>
+              <a:spcAft>
+                <a:spcPts val="600"/>
+              </a:spcAft>
             </a:pPr>
             <a:r>
               <a:rPr sz="1800">
@@ -5608,14 +5694,14 @@
           <a:noFill/>
         </p:spPr>
         <p:txBody>
-          <a:bodyPr wrap="square" lIns="45720" rIns="45720" tIns="18288" bIns="18288">
-            <a:spAutoFit/>
+          <a:bodyPr wrap="square" anchor="ctr" lIns="0" rIns="0" tIns="0" bIns="0">
+            <a:noAutofit/>
           </a:bodyPr>
           <a:lstStyle/>
           <a:p>
             <a:pPr algn="l"/>
             <a:r>
-              <a:rPr sz="1100" b="0">
+              <a:rPr sz="1100" b="0" i="1">
                 <a:solidFill>
                   <a:srgbClr val="808080"/>
                 </a:solidFill>
@@ -5651,8 +5737,8 @@
         </p:nvSpPr>
         <p:spPr>
           <a:xfrm>
-            <a:off x="457200" y="457200"/>
-            <a:ext cx="11277295" cy="822960"/>
+            <a:off x="457200" y="365760"/>
+            <a:ext cx="11277295" cy="914400"/>
           </a:xfrm>
           <a:prstGeom prst="rect">
             <a:avLst/>
@@ -5660,14 +5746,14 @@
           <a:noFill/>
         </p:spPr>
         <p:txBody>
-          <a:bodyPr wrap="square" lIns="45720" rIns="45720" tIns="18288" bIns="18288">
-            <a:spAutoFit/>
+          <a:bodyPr wrap="square" anchor="ctr" lIns="0" rIns="0" tIns="0" bIns="0">
+            <a:noAutofit/>
           </a:bodyPr>
           <a:lstStyle/>
           <a:p>
             <a:pPr algn="l"/>
             <a:r>
-              <a:rPr sz="3000" b="1">
+              <a:rPr sz="2800" b="1" i="0">
                 <a:solidFill>
                   <a:srgbClr val="1F4E78"/>
                 </a:solidFill>
@@ -5685,8 +5771,8 @@
         </p:nvSpPr>
         <p:spPr>
           <a:xfrm>
-            <a:off x="457200" y="1234440"/>
-            <a:ext cx="1828800" cy="36576"/>
+            <a:off x="457200" y="1298448"/>
+            <a:ext cx="2194560" cy="36576"/>
           </a:xfrm>
           <a:prstGeom prst="rect">
             <a:avLst/>
@@ -5728,8 +5814,8 @@
         </p:nvSpPr>
         <p:spPr>
           <a:xfrm>
-            <a:off x="822960" y="1463040"/>
-            <a:ext cx="10545775" cy="4892040"/>
+            <a:off x="822960" y="2148840"/>
+            <a:ext cx="10545775" cy="4114800"/>
           </a:xfrm>
           <a:prstGeom prst="rect">
             <a:avLst/>
@@ -5737,15 +5823,18 @@
           <a:noFill/>
         </p:spPr>
         <p:txBody>
-          <a:bodyPr wrap="square" lIns="45720" rIns="45720">
-            <a:spAutoFit/>
+          <a:bodyPr wrap="square" anchor="t" lIns="0" rIns="0" tIns="0" bIns="0">
+            <a:noAutofit/>
           </a:bodyPr>
           <a:lstStyle/>
           <a:p>
             <a:pPr algn="l">
               <a:lnSpc>
-                <a:spcPct val="130000"/>
+                <a:spcPct val="135000"/>
               </a:lnSpc>
+              <a:spcAft>
+                <a:spcPts val="600"/>
+              </a:spcAft>
             </a:pPr>
             <a:r>
               <a:rPr sz="2200">
@@ -5836,14 +5925,14 @@
           <a:noFill/>
         </p:spPr>
         <p:txBody>
-          <a:bodyPr wrap="square" lIns="45720" rIns="45720" tIns="18288" bIns="18288">
-            <a:spAutoFit/>
+          <a:bodyPr wrap="square" anchor="ctr" lIns="0" rIns="0" tIns="0" bIns="0">
+            <a:noAutofit/>
           </a:bodyPr>
           <a:lstStyle/>
           <a:p>
             <a:pPr algn="ctr"/>
             <a:r>
-              <a:rPr sz="5800" b="1">
+              <a:rPr sz="5800" b="1" i="0">
                 <a:solidFill>
                   <a:srgbClr val="FFFFFF"/>
                 </a:solidFill>
@@ -5879,8 +5968,8 @@
         </p:nvSpPr>
         <p:spPr>
           <a:xfrm>
-            <a:off x="457200" y="457200"/>
-            <a:ext cx="11277295" cy="822960"/>
+            <a:off x="457200" y="365760"/>
+            <a:ext cx="11277295" cy="914400"/>
           </a:xfrm>
           <a:prstGeom prst="rect">
             <a:avLst/>
@@ -5888,14 +5977,14 @@
           <a:noFill/>
         </p:spPr>
         <p:txBody>
-          <a:bodyPr wrap="square" lIns="45720" rIns="45720" tIns="18288" bIns="18288">
-            <a:spAutoFit/>
+          <a:bodyPr wrap="square" anchor="ctr" lIns="0" rIns="0" tIns="0" bIns="0">
+            <a:noAutofit/>
           </a:bodyPr>
           <a:lstStyle/>
           <a:p>
             <a:pPr algn="l"/>
             <a:r>
-              <a:rPr sz="3000" b="1">
+              <a:rPr sz="2800" b="1" i="0">
                 <a:solidFill>
                   <a:srgbClr val="1F4E78"/>
                 </a:solidFill>
@@ -5913,8 +6002,8 @@
         </p:nvSpPr>
         <p:spPr>
           <a:xfrm>
-            <a:off x="457200" y="1234440"/>
-            <a:ext cx="1828800" cy="36576"/>
+            <a:off x="457200" y="1298448"/>
+            <a:ext cx="2194560" cy="36576"/>
           </a:xfrm>
           <a:prstGeom prst="rect">
             <a:avLst/>
@@ -5956,8 +6045,8 @@
         </p:nvSpPr>
         <p:spPr>
           <a:xfrm>
-            <a:off x="457200" y="1463040"/>
-            <a:ext cx="11277295" cy="640080"/>
+            <a:off x="457200" y="1508760"/>
+            <a:ext cx="11277295" cy="502920"/>
           </a:xfrm>
           <a:prstGeom prst="rect">
             <a:avLst/>
@@ -5965,14 +6054,14 @@
           <a:noFill/>
         </p:spPr>
         <p:txBody>
-          <a:bodyPr wrap="square" lIns="45720" rIns="45720" tIns="18288" bIns="18288">
-            <a:spAutoFit/>
+          <a:bodyPr wrap="square" anchor="ctr" lIns="0" rIns="0" tIns="0" bIns="0">
+            <a:noAutofit/>
           </a:bodyPr>
           <a:lstStyle/>
           <a:p>
             <a:pPr algn="l"/>
             <a:r>
-              <a:rPr sz="2200" b="1">
+              <a:rPr sz="2000" b="1" i="0">
                 <a:solidFill>
                   <a:srgbClr val="C0392B"/>
                 </a:solidFill>
@@ -5990,8 +6079,8 @@
         </p:nvSpPr>
         <p:spPr>
           <a:xfrm>
-            <a:off x="640080" y="2286000"/>
-            <a:ext cx="10911535" cy="4069080"/>
+            <a:off x="640080" y="2148840"/>
+            <a:ext cx="10911535" cy="4114800"/>
           </a:xfrm>
           <a:prstGeom prst="rect">
             <a:avLst/>
@@ -5999,15 +6088,18 @@
           <a:noFill/>
         </p:spPr>
         <p:txBody>
-          <a:bodyPr wrap="square" lIns="45720" rIns="45720">
-            <a:spAutoFit/>
+          <a:bodyPr wrap="square" anchor="t" lIns="0" rIns="0" tIns="0" bIns="0">
+            <a:noAutofit/>
           </a:bodyPr>
           <a:lstStyle/>
           <a:p>
             <a:pPr algn="l">
               <a:lnSpc>
-                <a:spcPct val="130000"/>
+                <a:spcPct val="135000"/>
               </a:lnSpc>
+              <a:spcAft>
+                <a:spcPts val="600"/>
+              </a:spcAft>
             </a:pPr>
             <a:r>
               <a:rPr sz="1800">
@@ -6021,8 +6113,11 @@
           <a:p>
             <a:pPr algn="l">
               <a:lnSpc>
-                <a:spcPct val="130000"/>
+                <a:spcPct val="135000"/>
               </a:lnSpc>
+              <a:spcAft>
+                <a:spcPts val="600"/>
+              </a:spcAft>
             </a:pPr>
             <a:r>
               <a:rPr sz="1800">
@@ -6036,8 +6131,11 @@
           <a:p>
             <a:pPr algn="l">
               <a:lnSpc>
-                <a:spcPct val="130000"/>
+                <a:spcPct val="135000"/>
               </a:lnSpc>
+              <a:spcAft>
+                <a:spcPts val="600"/>
+              </a:spcAft>
             </a:pPr>
             <a:r>
               <a:rPr sz="1800">
@@ -6051,8 +6149,11 @@
           <a:p>
             <a:pPr algn="l">
               <a:lnSpc>
-                <a:spcPct val="130000"/>
+                <a:spcPct val="135000"/>
               </a:lnSpc>
+              <a:spcAft>
+                <a:spcPts val="600"/>
+              </a:spcAft>
             </a:pPr>
             <a:r>
               <a:rPr sz="1800">
@@ -6091,8 +6192,8 @@
         </p:nvSpPr>
         <p:spPr>
           <a:xfrm>
-            <a:off x="457200" y="457200"/>
-            <a:ext cx="11277295" cy="822960"/>
+            <a:off x="457200" y="365760"/>
+            <a:ext cx="11277295" cy="914400"/>
           </a:xfrm>
           <a:prstGeom prst="rect">
             <a:avLst/>
@@ -6100,14 +6201,14 @@
           <a:noFill/>
         </p:spPr>
         <p:txBody>
-          <a:bodyPr wrap="square" lIns="45720" rIns="45720" tIns="18288" bIns="18288">
-            <a:spAutoFit/>
+          <a:bodyPr wrap="square" anchor="ctr" lIns="0" rIns="0" tIns="0" bIns="0">
+            <a:noAutofit/>
           </a:bodyPr>
           <a:lstStyle/>
           <a:p>
             <a:pPr algn="l"/>
             <a:r>
-              <a:rPr sz="3000" b="1">
+              <a:rPr sz="2800" b="1" i="0">
                 <a:solidFill>
                   <a:srgbClr val="1F4E78"/>
                 </a:solidFill>
@@ -6125,8 +6226,8 @@
         </p:nvSpPr>
         <p:spPr>
           <a:xfrm>
-            <a:off x="457200" y="1234440"/>
-            <a:ext cx="1828800" cy="36576"/>
+            <a:off x="457200" y="1298448"/>
+            <a:ext cx="2194560" cy="36576"/>
           </a:xfrm>
           <a:prstGeom prst="rect">
             <a:avLst/>
@@ -6168,8 +6269,8 @@
         </p:nvSpPr>
         <p:spPr>
           <a:xfrm>
-            <a:off x="457200" y="1463040"/>
-            <a:ext cx="11277295" cy="640080"/>
+            <a:off x="457200" y="1508760"/>
+            <a:ext cx="11277295" cy="502920"/>
           </a:xfrm>
           <a:prstGeom prst="rect">
             <a:avLst/>
@@ -6177,14 +6278,14 @@
           <a:noFill/>
         </p:spPr>
         <p:txBody>
-          <a:bodyPr wrap="square" lIns="45720" rIns="45720" tIns="18288" bIns="18288">
-            <a:spAutoFit/>
+          <a:bodyPr wrap="square" anchor="ctr" lIns="0" rIns="0" tIns="0" bIns="0">
+            <a:noAutofit/>
           </a:bodyPr>
           <a:lstStyle/>
           <a:p>
             <a:pPr algn="l"/>
             <a:r>
-              <a:rPr sz="2200" b="1">
+              <a:rPr sz="2000" b="1" i="0">
                 <a:solidFill>
                   <a:srgbClr val="C0392B"/>
                 </a:solidFill>
@@ -6202,8 +6303,8 @@
         </p:nvSpPr>
         <p:spPr>
           <a:xfrm>
-            <a:off x="640080" y="2286000"/>
-            <a:ext cx="10911535" cy="4069080"/>
+            <a:off x="640080" y="2148840"/>
+            <a:ext cx="10911535" cy="4114800"/>
           </a:xfrm>
           <a:prstGeom prst="rect">
             <a:avLst/>
@@ -6211,15 +6312,18 @@
           <a:noFill/>
         </p:spPr>
         <p:txBody>
-          <a:bodyPr wrap="square" lIns="45720" rIns="45720">
-            <a:spAutoFit/>
+          <a:bodyPr wrap="square" anchor="t" lIns="0" rIns="0" tIns="0" bIns="0">
+            <a:noAutofit/>
           </a:bodyPr>
           <a:lstStyle/>
           <a:p>
             <a:pPr algn="l">
               <a:lnSpc>
-                <a:spcPct val="130000"/>
+                <a:spcPct val="135000"/>
               </a:lnSpc>
+              <a:spcAft>
+                <a:spcPts val="600"/>
+              </a:spcAft>
             </a:pPr>
             <a:r>
               <a:rPr sz="1800">
@@ -6233,8 +6337,11 @@
           <a:p>
             <a:pPr algn="l">
               <a:lnSpc>
-                <a:spcPct val="130000"/>
+                <a:spcPct val="135000"/>
               </a:lnSpc>
+              <a:spcAft>
+                <a:spcPts val="600"/>
+              </a:spcAft>
             </a:pPr>
             <a:r>
               <a:rPr sz="1800">
@@ -6248,8 +6355,11 @@
           <a:p>
             <a:pPr algn="l">
               <a:lnSpc>
-                <a:spcPct val="130000"/>
+                <a:spcPct val="135000"/>
               </a:lnSpc>
+              <a:spcAft>
+                <a:spcPts val="600"/>
+              </a:spcAft>
             </a:pPr>
             <a:r>
               <a:rPr sz="1800">
@@ -6263,8 +6373,11 @@
           <a:p>
             <a:pPr algn="l">
               <a:lnSpc>
-                <a:spcPct val="130000"/>
+                <a:spcPct val="135000"/>
               </a:lnSpc>
+              <a:spcAft>
+                <a:spcPts val="600"/>
+              </a:spcAft>
             </a:pPr>
             <a:r>
               <a:rPr sz="1800">
@@ -6303,8 +6416,8 @@
         </p:nvSpPr>
         <p:spPr>
           <a:xfrm>
-            <a:off x="457200" y="457200"/>
-            <a:ext cx="11277295" cy="822960"/>
+            <a:off x="457200" y="365760"/>
+            <a:ext cx="11277295" cy="914400"/>
           </a:xfrm>
           <a:prstGeom prst="rect">
             <a:avLst/>
@@ -6312,14 +6425,14 @@
           <a:noFill/>
         </p:spPr>
         <p:txBody>
-          <a:bodyPr wrap="square" lIns="45720" rIns="45720" tIns="18288" bIns="18288">
-            <a:spAutoFit/>
+          <a:bodyPr wrap="square" anchor="ctr" lIns="0" rIns="0" tIns="0" bIns="0">
+            <a:noAutofit/>
           </a:bodyPr>
           <a:lstStyle/>
           <a:p>
             <a:pPr algn="l"/>
             <a:r>
-              <a:rPr sz="3000" b="1">
+              <a:rPr sz="2800" b="1" i="0">
                 <a:solidFill>
                   <a:srgbClr val="1F4E78"/>
                 </a:solidFill>
@@ -6337,8 +6450,8 @@
         </p:nvSpPr>
         <p:spPr>
           <a:xfrm>
-            <a:off x="457200" y="1234440"/>
-            <a:ext cx="1828800" cy="36576"/>
+            <a:off x="457200" y="1298448"/>
+            <a:ext cx="2194560" cy="36576"/>
           </a:xfrm>
           <a:prstGeom prst="rect">
             <a:avLst/>
@@ -6380,8 +6493,8 @@
         </p:nvSpPr>
         <p:spPr>
           <a:xfrm>
-            <a:off x="457200" y="1463040"/>
-            <a:ext cx="11277295" cy="640080"/>
+            <a:off x="457200" y="1508760"/>
+            <a:ext cx="11277295" cy="502920"/>
           </a:xfrm>
           <a:prstGeom prst="rect">
             <a:avLst/>
@@ -6389,14 +6502,14 @@
           <a:noFill/>
         </p:spPr>
         <p:txBody>
-          <a:bodyPr wrap="square" lIns="45720" rIns="45720" tIns="18288" bIns="18288">
-            <a:spAutoFit/>
+          <a:bodyPr wrap="square" anchor="ctr" lIns="0" rIns="0" tIns="0" bIns="0">
+            <a:noAutofit/>
           </a:bodyPr>
           <a:lstStyle/>
           <a:p>
             <a:pPr algn="l"/>
             <a:r>
-              <a:rPr sz="2200" b="1">
+              <a:rPr sz="2000" b="1" i="0">
                 <a:solidFill>
                   <a:srgbClr val="C0392B"/>
                 </a:solidFill>
@@ -6414,8 +6527,8 @@
         </p:nvSpPr>
         <p:spPr>
           <a:xfrm>
-            <a:off x="640080" y="2286000"/>
-            <a:ext cx="10911535" cy="4069080"/>
+            <a:off x="640080" y="2148840"/>
+            <a:ext cx="10911535" cy="4114800"/>
           </a:xfrm>
           <a:prstGeom prst="rect">
             <a:avLst/>
@@ -6423,15 +6536,18 @@
           <a:noFill/>
         </p:spPr>
         <p:txBody>
-          <a:bodyPr wrap="square" lIns="45720" rIns="45720">
-            <a:spAutoFit/>
+          <a:bodyPr wrap="square" anchor="t" lIns="0" rIns="0" tIns="0" bIns="0">
+            <a:noAutofit/>
           </a:bodyPr>
           <a:lstStyle/>
           <a:p>
             <a:pPr algn="l">
               <a:lnSpc>
-                <a:spcPct val="130000"/>
+                <a:spcPct val="135000"/>
               </a:lnSpc>
+              <a:spcAft>
+                <a:spcPts val="600"/>
+              </a:spcAft>
             </a:pPr>
             <a:r>
               <a:rPr sz="1800">
@@ -6445,8 +6561,11 @@
           <a:p>
             <a:pPr algn="l">
               <a:lnSpc>
-                <a:spcPct val="130000"/>
+                <a:spcPct val="135000"/>
               </a:lnSpc>
+              <a:spcAft>
+                <a:spcPts val="600"/>
+              </a:spcAft>
             </a:pPr>
             <a:r>
               <a:rPr sz="1800">
@@ -6460,8 +6579,11 @@
           <a:p>
             <a:pPr algn="l">
               <a:lnSpc>
-                <a:spcPct val="130000"/>
+                <a:spcPct val="135000"/>
               </a:lnSpc>
+              <a:spcAft>
+                <a:spcPts val="600"/>
+              </a:spcAft>
             </a:pPr>
             <a:r>
               <a:rPr sz="1800">
@@ -6475,8 +6597,11 @@
           <a:p>
             <a:pPr algn="l">
               <a:lnSpc>
-                <a:spcPct val="130000"/>
+                <a:spcPct val="135000"/>
               </a:lnSpc>
+              <a:spcAft>
+                <a:spcPts val="600"/>
+              </a:spcAft>
             </a:pPr>
             <a:r>
               <a:rPr sz="1800">
@@ -6506,14 +6631,14 @@
           <a:noFill/>
         </p:spPr>
         <p:txBody>
-          <a:bodyPr wrap="square" lIns="45720" rIns="45720" tIns="18288" bIns="18288">
-            <a:spAutoFit/>
+          <a:bodyPr wrap="square" anchor="ctr" lIns="0" rIns="0" tIns="0" bIns="0">
+            <a:noAutofit/>
           </a:bodyPr>
           <a:lstStyle/>
           <a:p>
             <a:pPr algn="l"/>
             <a:r>
-              <a:rPr sz="1100" b="0">
+              <a:rPr sz="1100" b="0" i="1">
                 <a:solidFill>
                   <a:srgbClr val="808080"/>
                 </a:solidFill>
@@ -6549,8 +6674,8 @@
         </p:nvSpPr>
         <p:spPr>
           <a:xfrm>
-            <a:off x="457200" y="457200"/>
-            <a:ext cx="11277295" cy="822960"/>
+            <a:off x="457200" y="365760"/>
+            <a:ext cx="11277295" cy="914400"/>
           </a:xfrm>
           <a:prstGeom prst="rect">
             <a:avLst/>
@@ -6558,14 +6683,14 @@
           <a:noFill/>
         </p:spPr>
         <p:txBody>
-          <a:bodyPr wrap="square" lIns="45720" rIns="45720" tIns="18288" bIns="18288">
-            <a:spAutoFit/>
+          <a:bodyPr wrap="square" anchor="ctr" lIns="0" rIns="0" tIns="0" bIns="0">
+            <a:noAutofit/>
           </a:bodyPr>
           <a:lstStyle/>
           <a:p>
             <a:pPr algn="l"/>
             <a:r>
-              <a:rPr sz="3000" b="1">
+              <a:rPr sz="2800" b="1" i="0">
                 <a:solidFill>
                   <a:srgbClr val="1F4E78"/>
                 </a:solidFill>
@@ -6583,8 +6708,8 @@
         </p:nvSpPr>
         <p:spPr>
           <a:xfrm>
-            <a:off x="457200" y="1234440"/>
-            <a:ext cx="1828800" cy="36576"/>
+            <a:off x="457200" y="1298448"/>
+            <a:ext cx="2194560" cy="36576"/>
           </a:xfrm>
           <a:prstGeom prst="rect">
             <a:avLst/>
@@ -6626,8 +6751,8 @@
         </p:nvSpPr>
         <p:spPr>
           <a:xfrm>
-            <a:off x="457200" y="1463040"/>
-            <a:ext cx="11277295" cy="640080"/>
+            <a:off x="457200" y="1508760"/>
+            <a:ext cx="11277295" cy="502920"/>
           </a:xfrm>
           <a:prstGeom prst="rect">
             <a:avLst/>
@@ -6635,14 +6760,14 @@
           <a:noFill/>
         </p:spPr>
         <p:txBody>
-          <a:bodyPr wrap="square" lIns="45720" rIns="45720" tIns="18288" bIns="18288">
-            <a:spAutoFit/>
+          <a:bodyPr wrap="square" anchor="ctr" lIns="0" rIns="0" tIns="0" bIns="0">
+            <a:noAutofit/>
           </a:bodyPr>
           <a:lstStyle/>
           <a:p>
             <a:pPr algn="l"/>
             <a:r>
-              <a:rPr sz="2200" b="1">
+              <a:rPr sz="2000" b="1" i="0">
                 <a:solidFill>
                   <a:srgbClr val="C0392B"/>
                 </a:solidFill>
@@ -6660,8 +6785,8 @@
         </p:nvSpPr>
         <p:spPr>
           <a:xfrm>
-            <a:off x="640080" y="2286000"/>
-            <a:ext cx="10911535" cy="4069080"/>
+            <a:off x="640080" y="2148840"/>
+            <a:ext cx="10911535" cy="4114800"/>
           </a:xfrm>
           <a:prstGeom prst="rect">
             <a:avLst/>
@@ -6669,15 +6794,18 @@
           <a:noFill/>
         </p:spPr>
         <p:txBody>
-          <a:bodyPr wrap="square" lIns="45720" rIns="45720">
-            <a:spAutoFit/>
+          <a:bodyPr wrap="square" anchor="t" lIns="0" rIns="0" tIns="0" bIns="0">
+            <a:noAutofit/>
           </a:bodyPr>
           <a:lstStyle/>
           <a:p>
             <a:pPr algn="l">
               <a:lnSpc>
-                <a:spcPct val="130000"/>
+                <a:spcPct val="135000"/>
               </a:lnSpc>
+              <a:spcAft>
+                <a:spcPts val="600"/>
+              </a:spcAft>
             </a:pPr>
             <a:r>
               <a:rPr sz="1800">
@@ -6691,8 +6819,11 @@
           <a:p>
             <a:pPr algn="l">
               <a:lnSpc>
-                <a:spcPct val="130000"/>
+                <a:spcPct val="135000"/>
               </a:lnSpc>
+              <a:spcAft>
+                <a:spcPts val="600"/>
+              </a:spcAft>
             </a:pPr>
             <a:r>
               <a:rPr sz="1800">
@@ -6706,8 +6837,11 @@
           <a:p>
             <a:pPr algn="l">
               <a:lnSpc>
-                <a:spcPct val="130000"/>
+                <a:spcPct val="135000"/>
               </a:lnSpc>
+              <a:spcAft>
+                <a:spcPts val="600"/>
+              </a:spcAft>
             </a:pPr>
             <a:r>
               <a:rPr sz="1800">
@@ -6721,8 +6855,11 @@
           <a:p>
             <a:pPr algn="l">
               <a:lnSpc>
-                <a:spcPct val="130000"/>
+                <a:spcPct val="135000"/>
               </a:lnSpc>
+              <a:spcAft>
+                <a:spcPts val="600"/>
+              </a:spcAft>
             </a:pPr>
             <a:r>
               <a:rPr sz="1800">
@@ -6761,8 +6898,8 @@
         </p:nvSpPr>
         <p:spPr>
           <a:xfrm>
-            <a:off x="457200" y="457200"/>
-            <a:ext cx="11277295" cy="822960"/>
+            <a:off x="457200" y="365760"/>
+            <a:ext cx="11277295" cy="914400"/>
           </a:xfrm>
           <a:prstGeom prst="rect">
             <a:avLst/>
@@ -6770,14 +6907,14 @@
           <a:noFill/>
         </p:spPr>
         <p:txBody>
-          <a:bodyPr wrap="square" lIns="45720" rIns="45720" tIns="18288" bIns="18288">
-            <a:spAutoFit/>
+          <a:bodyPr wrap="square" anchor="ctr" lIns="0" rIns="0" tIns="0" bIns="0">
+            <a:noAutofit/>
           </a:bodyPr>
           <a:lstStyle/>
           <a:p>
             <a:pPr algn="l"/>
             <a:r>
-              <a:rPr sz="3000" b="1">
+              <a:rPr sz="2800" b="1" i="0">
                 <a:solidFill>
                   <a:srgbClr val="1F4E78"/>
                 </a:solidFill>
@@ -6795,8 +6932,8 @@
         </p:nvSpPr>
         <p:spPr>
           <a:xfrm>
-            <a:off x="457200" y="1234440"/>
-            <a:ext cx="1828800" cy="36576"/>
+            <a:off x="457200" y="1298448"/>
+            <a:ext cx="2194560" cy="36576"/>
           </a:xfrm>
           <a:prstGeom prst="rect">
             <a:avLst/>
@@ -6838,8 +6975,8 @@
         </p:nvSpPr>
         <p:spPr>
           <a:xfrm>
-            <a:off x="457200" y="1463040"/>
-            <a:ext cx="11277295" cy="640080"/>
+            <a:off x="457200" y="1508760"/>
+            <a:ext cx="11277295" cy="502920"/>
           </a:xfrm>
           <a:prstGeom prst="rect">
             <a:avLst/>
@@ -6847,14 +6984,14 @@
           <a:noFill/>
         </p:spPr>
         <p:txBody>
-          <a:bodyPr wrap="square" lIns="45720" rIns="45720" tIns="18288" bIns="18288">
-            <a:spAutoFit/>
+          <a:bodyPr wrap="square" anchor="ctr" lIns="0" rIns="0" tIns="0" bIns="0">
+            <a:noAutofit/>
           </a:bodyPr>
           <a:lstStyle/>
           <a:p>
             <a:pPr algn="l"/>
             <a:r>
-              <a:rPr sz="2200" b="1">
+              <a:rPr sz="2000" b="1" i="0">
                 <a:solidFill>
                   <a:srgbClr val="C0392B"/>
                 </a:solidFill>
@@ -6872,8 +7009,8 @@
         </p:nvSpPr>
         <p:spPr>
           <a:xfrm>
-            <a:off x="640080" y="2286000"/>
-            <a:ext cx="10911535" cy="4069080"/>
+            <a:off x="640080" y="2148840"/>
+            <a:ext cx="10911535" cy="4114800"/>
           </a:xfrm>
           <a:prstGeom prst="rect">
             <a:avLst/>
@@ -6881,15 +7018,18 @@
           <a:noFill/>
         </p:spPr>
         <p:txBody>
-          <a:bodyPr wrap="square" lIns="45720" rIns="45720">
-            <a:spAutoFit/>
+          <a:bodyPr wrap="square" anchor="t" lIns="0" rIns="0" tIns="0" bIns="0">
+            <a:noAutofit/>
           </a:bodyPr>
           <a:lstStyle/>
           <a:p>
             <a:pPr algn="l">
               <a:lnSpc>
-                <a:spcPct val="130000"/>
+                <a:spcPct val="135000"/>
               </a:lnSpc>
+              <a:spcAft>
+                <a:spcPts val="600"/>
+              </a:spcAft>
             </a:pPr>
             <a:r>
               <a:rPr sz="1800">
@@ -6903,8 +7043,11 @@
           <a:p>
             <a:pPr algn="l">
               <a:lnSpc>
-                <a:spcPct val="130000"/>
+                <a:spcPct val="135000"/>
               </a:lnSpc>
+              <a:spcAft>
+                <a:spcPts val="600"/>
+              </a:spcAft>
             </a:pPr>
             <a:r>
               <a:rPr sz="1800">
@@ -6918,8 +7061,11 @@
           <a:p>
             <a:pPr algn="l">
               <a:lnSpc>
-                <a:spcPct val="130000"/>
+                <a:spcPct val="135000"/>
               </a:lnSpc>
+              <a:spcAft>
+                <a:spcPts val="600"/>
+              </a:spcAft>
             </a:pPr>
             <a:r>
               <a:rPr sz="1800">
@@ -6933,8 +7079,11 @@
           <a:p>
             <a:pPr algn="l">
               <a:lnSpc>
-                <a:spcPct val="130000"/>
+                <a:spcPct val="135000"/>
               </a:lnSpc>
+              <a:spcAft>
+                <a:spcPts val="600"/>
+              </a:spcAft>
             </a:pPr>
             <a:r>
               <a:rPr sz="1800">
@@ -6973,8 +7122,8 @@
         </p:nvSpPr>
         <p:spPr>
           <a:xfrm>
-            <a:off x="457200" y="457200"/>
-            <a:ext cx="11277295" cy="822960"/>
+            <a:off x="457200" y="365760"/>
+            <a:ext cx="11277295" cy="914400"/>
           </a:xfrm>
           <a:prstGeom prst="rect">
             <a:avLst/>
@@ -6982,14 +7131,14 @@
           <a:noFill/>
         </p:spPr>
         <p:txBody>
-          <a:bodyPr wrap="square" lIns="45720" rIns="45720" tIns="18288" bIns="18288">
-            <a:spAutoFit/>
+          <a:bodyPr wrap="square" anchor="ctr" lIns="0" rIns="0" tIns="0" bIns="0">
+            <a:noAutofit/>
           </a:bodyPr>
           <a:lstStyle/>
           <a:p>
             <a:pPr algn="l"/>
             <a:r>
-              <a:rPr sz="3000" b="1">
+              <a:rPr sz="2800" b="1" i="0">
                 <a:solidFill>
                   <a:srgbClr val="1F4E78"/>
                 </a:solidFill>
@@ -7007,8 +7156,8 @@
         </p:nvSpPr>
         <p:spPr>
           <a:xfrm>
-            <a:off x="457200" y="1234440"/>
-            <a:ext cx="1828800" cy="36576"/>
+            <a:off x="457200" y="1298448"/>
+            <a:ext cx="2194560" cy="36576"/>
           </a:xfrm>
           <a:prstGeom prst="rect">
             <a:avLst/>
@@ -7050,8 +7199,8 @@
         </p:nvSpPr>
         <p:spPr>
           <a:xfrm>
-            <a:off x="457200" y="1463040"/>
-            <a:ext cx="11277295" cy="640080"/>
+            <a:off x="457200" y="1508760"/>
+            <a:ext cx="11277295" cy="502920"/>
           </a:xfrm>
           <a:prstGeom prst="rect">
             <a:avLst/>
@@ -7059,14 +7208,14 @@
           <a:noFill/>
         </p:spPr>
         <p:txBody>
-          <a:bodyPr wrap="square" lIns="45720" rIns="45720" tIns="18288" bIns="18288">
-            <a:spAutoFit/>
+          <a:bodyPr wrap="square" anchor="ctr" lIns="0" rIns="0" tIns="0" bIns="0">
+            <a:noAutofit/>
           </a:bodyPr>
           <a:lstStyle/>
           <a:p>
             <a:pPr algn="l"/>
             <a:r>
-              <a:rPr sz="2200" b="1">
+              <a:rPr sz="2000" b="1" i="0">
                 <a:solidFill>
                   <a:srgbClr val="C0392B"/>
                 </a:solidFill>
@@ -7084,8 +7233,8 @@
         </p:nvSpPr>
         <p:spPr>
           <a:xfrm>
-            <a:off x="640080" y="2286000"/>
-            <a:ext cx="10911535" cy="4069080"/>
+            <a:off x="640080" y="2148840"/>
+            <a:ext cx="10911535" cy="4114800"/>
           </a:xfrm>
           <a:prstGeom prst="rect">
             <a:avLst/>
@@ -7093,15 +7242,18 @@
           <a:noFill/>
         </p:spPr>
         <p:txBody>
-          <a:bodyPr wrap="square" lIns="45720" rIns="45720">
-            <a:spAutoFit/>
+          <a:bodyPr wrap="square" anchor="t" lIns="0" rIns="0" tIns="0" bIns="0">
+            <a:noAutofit/>
           </a:bodyPr>
           <a:lstStyle/>
           <a:p>
             <a:pPr algn="l">
               <a:lnSpc>
-                <a:spcPct val="130000"/>
+                <a:spcPct val="135000"/>
               </a:lnSpc>
+              <a:spcAft>
+                <a:spcPts val="600"/>
+              </a:spcAft>
             </a:pPr>
             <a:r>
               <a:rPr sz="1800">
@@ -7115,8 +7267,11 @@
           <a:p>
             <a:pPr algn="l">
               <a:lnSpc>
-                <a:spcPct val="130000"/>
+                <a:spcPct val="135000"/>
               </a:lnSpc>
+              <a:spcAft>
+                <a:spcPts val="600"/>
+              </a:spcAft>
             </a:pPr>
             <a:r>
               <a:rPr sz="1800">
@@ -7130,8 +7285,11 @@
           <a:p>
             <a:pPr algn="l">
               <a:lnSpc>
-                <a:spcPct val="130000"/>
+                <a:spcPct val="135000"/>
               </a:lnSpc>
+              <a:spcAft>
+                <a:spcPts val="600"/>
+              </a:spcAft>
             </a:pPr>
             <a:r>
               <a:rPr sz="1800">
@@ -7145,8 +7303,11 @@
           <a:p>
             <a:pPr algn="l">
               <a:lnSpc>
-                <a:spcPct val="130000"/>
+                <a:spcPct val="135000"/>
               </a:lnSpc>
+              <a:spcAft>
+                <a:spcPts val="600"/>
+              </a:spcAft>
             </a:pPr>
             <a:r>
               <a:rPr sz="1800">
@@ -7185,8 +7346,8 @@
         </p:nvSpPr>
         <p:spPr>
           <a:xfrm>
-            <a:off x="457200" y="457200"/>
-            <a:ext cx="11277295" cy="822960"/>
+            <a:off x="457200" y="365760"/>
+            <a:ext cx="11277295" cy="914400"/>
           </a:xfrm>
           <a:prstGeom prst="rect">
             <a:avLst/>
@@ -7194,14 +7355,14 @@
           <a:noFill/>
         </p:spPr>
         <p:txBody>
-          <a:bodyPr wrap="square" lIns="45720" rIns="45720" tIns="18288" bIns="18288">
-            <a:spAutoFit/>
+          <a:bodyPr wrap="square" anchor="ctr" lIns="0" rIns="0" tIns="0" bIns="0">
+            <a:noAutofit/>
           </a:bodyPr>
           <a:lstStyle/>
           <a:p>
             <a:pPr algn="l"/>
             <a:r>
-              <a:rPr sz="3000" b="1">
+              <a:rPr sz="2800" b="1" i="0">
                 <a:solidFill>
                   <a:srgbClr val="1F4E78"/>
                 </a:solidFill>
@@ -7219,8 +7380,8 @@
         </p:nvSpPr>
         <p:spPr>
           <a:xfrm>
-            <a:off x="457200" y="1234440"/>
-            <a:ext cx="1828800" cy="36576"/>
+            <a:off x="457200" y="1298448"/>
+            <a:ext cx="2194560" cy="36576"/>
           </a:xfrm>
           <a:prstGeom prst="rect">
             <a:avLst/>
@@ -7262,8 +7423,8 @@
         </p:nvSpPr>
         <p:spPr>
           <a:xfrm>
-            <a:off x="457200" y="1463040"/>
-            <a:ext cx="11277295" cy="640080"/>
+            <a:off x="457200" y="1508760"/>
+            <a:ext cx="11277295" cy="502920"/>
           </a:xfrm>
           <a:prstGeom prst="rect">
             <a:avLst/>
@@ -7271,14 +7432,14 @@
           <a:noFill/>
         </p:spPr>
         <p:txBody>
-          <a:bodyPr wrap="square" lIns="45720" rIns="45720" tIns="18288" bIns="18288">
-            <a:spAutoFit/>
+          <a:bodyPr wrap="square" anchor="ctr" lIns="0" rIns="0" tIns="0" bIns="0">
+            <a:noAutofit/>
           </a:bodyPr>
           <a:lstStyle/>
           <a:p>
             <a:pPr algn="l"/>
             <a:r>
-              <a:rPr sz="2200" b="1">
+              <a:rPr sz="2000" b="1" i="0">
                 <a:solidFill>
                   <a:srgbClr val="C0392B"/>
                 </a:solidFill>
@@ -7296,8 +7457,8 @@
         </p:nvSpPr>
         <p:spPr>
           <a:xfrm>
-            <a:off x="640080" y="2286000"/>
-            <a:ext cx="10911535" cy="4069080"/>
+            <a:off x="640080" y="2148840"/>
+            <a:ext cx="10911535" cy="4114800"/>
           </a:xfrm>
           <a:prstGeom prst="rect">
             <a:avLst/>
@@ -7305,15 +7466,18 @@
           <a:noFill/>
         </p:spPr>
         <p:txBody>
-          <a:bodyPr wrap="square" lIns="45720" rIns="45720">
-            <a:spAutoFit/>
+          <a:bodyPr wrap="square" anchor="t" lIns="0" rIns="0" tIns="0" bIns="0">
+            <a:noAutofit/>
           </a:bodyPr>
           <a:lstStyle/>
           <a:p>
             <a:pPr algn="l">
               <a:lnSpc>
-                <a:spcPct val="130000"/>
+                <a:spcPct val="135000"/>
               </a:lnSpc>
+              <a:spcAft>
+                <a:spcPts val="600"/>
+              </a:spcAft>
             </a:pPr>
             <a:r>
               <a:rPr sz="1800">
@@ -7327,8 +7491,11 @@
           <a:p>
             <a:pPr algn="l">
               <a:lnSpc>
-                <a:spcPct val="130000"/>
+                <a:spcPct val="135000"/>
               </a:lnSpc>
+              <a:spcAft>
+                <a:spcPts val="600"/>
+              </a:spcAft>
             </a:pPr>
             <a:r>
               <a:rPr sz="1800">
@@ -7342,8 +7509,11 @@
           <a:p>
             <a:pPr algn="l">
               <a:lnSpc>
-                <a:spcPct val="130000"/>
+                <a:spcPct val="135000"/>
               </a:lnSpc>
+              <a:spcAft>
+                <a:spcPts val="600"/>
+              </a:spcAft>
             </a:pPr>
             <a:r>
               <a:rPr sz="1800">
@@ -7357,8 +7527,11 @@
           <a:p>
             <a:pPr algn="l">
               <a:lnSpc>
-                <a:spcPct val="130000"/>
+                <a:spcPct val="135000"/>
               </a:lnSpc>
+              <a:spcAft>
+                <a:spcPts val="600"/>
+              </a:spcAft>
             </a:pPr>
             <a:r>
               <a:rPr sz="1800">
@@ -7397,8 +7570,8 @@
         </p:nvSpPr>
         <p:spPr>
           <a:xfrm>
-            <a:off x="457200" y="457200"/>
-            <a:ext cx="11277295" cy="822960"/>
+            <a:off x="457200" y="365760"/>
+            <a:ext cx="11277295" cy="914400"/>
           </a:xfrm>
           <a:prstGeom prst="rect">
             <a:avLst/>
@@ -7406,14 +7579,14 @@
           <a:noFill/>
         </p:spPr>
         <p:txBody>
-          <a:bodyPr wrap="square" lIns="45720" rIns="45720" tIns="18288" bIns="18288">
-            <a:spAutoFit/>
+          <a:bodyPr wrap="square" anchor="ctr" lIns="0" rIns="0" tIns="0" bIns="0">
+            <a:noAutofit/>
           </a:bodyPr>
           <a:lstStyle/>
           <a:p>
             <a:pPr algn="l"/>
             <a:r>
-              <a:rPr sz="3000" b="1">
+              <a:rPr sz="2800" b="1" i="0">
                 <a:solidFill>
                   <a:srgbClr val="1F4E78"/>
                 </a:solidFill>
@@ -7431,8 +7604,8 @@
         </p:nvSpPr>
         <p:spPr>
           <a:xfrm>
-            <a:off x="457200" y="1234440"/>
-            <a:ext cx="1828800" cy="36576"/>
+            <a:off x="457200" y="1298448"/>
+            <a:ext cx="2194560" cy="36576"/>
           </a:xfrm>
           <a:prstGeom prst="rect">
             <a:avLst/>
@@ -7474,8 +7647,8 @@
         </p:nvSpPr>
         <p:spPr>
           <a:xfrm>
-            <a:off x="457200" y="1463040"/>
-            <a:ext cx="11277295" cy="640080"/>
+            <a:off x="457200" y="1508760"/>
+            <a:ext cx="11277295" cy="502920"/>
           </a:xfrm>
           <a:prstGeom prst="rect">
             <a:avLst/>
@@ -7483,14 +7656,14 @@
           <a:noFill/>
         </p:spPr>
         <p:txBody>
-          <a:bodyPr wrap="square" lIns="45720" rIns="45720" tIns="18288" bIns="18288">
-            <a:spAutoFit/>
+          <a:bodyPr wrap="square" anchor="ctr" lIns="0" rIns="0" tIns="0" bIns="0">
+            <a:noAutofit/>
           </a:bodyPr>
           <a:lstStyle/>
           <a:p>
             <a:pPr algn="l"/>
             <a:r>
-              <a:rPr sz="2200" b="1">
+              <a:rPr sz="2000" b="1" i="0">
                 <a:solidFill>
                   <a:srgbClr val="C0392B"/>
                 </a:solidFill>
@@ -7509,7 +7682,7 @@
           <p:nvPr/>
         </p:nvGraphicFramePr>
         <p:xfrm>
-          <a:off x="457200" y="2286000"/>
+          <a:off x="457200" y="2148840"/>
           <a:ext cx="11277295" cy="1371600"/>
         </p:xfrm>
         <a:graphic>
@@ -7690,8 +7863,8 @@
         </p:nvSpPr>
         <p:spPr>
           <a:xfrm>
-            <a:off x="457200" y="457200"/>
-            <a:ext cx="11277295" cy="822960"/>
+            <a:off x="457200" y="365760"/>
+            <a:ext cx="11277295" cy="914400"/>
           </a:xfrm>
           <a:prstGeom prst="rect">
             <a:avLst/>
@@ -7699,14 +7872,14 @@
           <a:noFill/>
         </p:spPr>
         <p:txBody>
-          <a:bodyPr wrap="square" lIns="45720" rIns="45720" tIns="18288" bIns="18288">
-            <a:spAutoFit/>
+          <a:bodyPr wrap="square" anchor="ctr" lIns="0" rIns="0" tIns="0" bIns="0">
+            <a:noAutofit/>
           </a:bodyPr>
           <a:lstStyle/>
           <a:p>
             <a:pPr algn="l"/>
             <a:r>
-              <a:rPr sz="3000" b="1">
+              <a:rPr sz="2800" b="1" i="0">
                 <a:solidFill>
                   <a:srgbClr val="1F4E78"/>
                 </a:solidFill>
@@ -7724,8 +7897,8 @@
         </p:nvSpPr>
         <p:spPr>
           <a:xfrm>
-            <a:off x="457200" y="1234440"/>
-            <a:ext cx="1828800" cy="36576"/>
+            <a:off x="457200" y="1298448"/>
+            <a:ext cx="2194560" cy="36576"/>
           </a:xfrm>
           <a:prstGeom prst="rect">
             <a:avLst/>
@@ -7767,8 +7940,8 @@
         </p:nvSpPr>
         <p:spPr>
           <a:xfrm>
-            <a:off x="457200" y="1463040"/>
-            <a:ext cx="11277295" cy="640080"/>
+            <a:off x="457200" y="1508760"/>
+            <a:ext cx="11277295" cy="502920"/>
           </a:xfrm>
           <a:prstGeom prst="rect">
             <a:avLst/>
@@ -7776,14 +7949,14 @@
           <a:noFill/>
         </p:spPr>
         <p:txBody>
-          <a:bodyPr wrap="square" lIns="45720" rIns="45720" tIns="18288" bIns="18288">
-            <a:spAutoFit/>
+          <a:bodyPr wrap="square" anchor="ctr" lIns="0" rIns="0" tIns="0" bIns="0">
+            <a:noAutofit/>
           </a:bodyPr>
           <a:lstStyle/>
           <a:p>
             <a:pPr algn="l"/>
             <a:r>
-              <a:rPr sz="2200" b="1">
+              <a:rPr sz="2000" b="1" i="0">
                 <a:solidFill>
                   <a:srgbClr val="C0392B"/>
                 </a:solidFill>
@@ -7801,8 +7974,8 @@
         </p:nvSpPr>
         <p:spPr>
           <a:xfrm>
-            <a:off x="731520" y="2286000"/>
-            <a:ext cx="10728655" cy="3977640"/>
+            <a:off x="731520" y="2148840"/>
+            <a:ext cx="10728655" cy="4114800"/>
           </a:xfrm>
           <a:prstGeom prst="rect">
             <a:avLst/>
@@ -7810,8 +7983,8 @@
           <a:noFill/>
         </p:spPr>
         <p:txBody>
-          <a:bodyPr wrap="none" tIns="91440">
-            <a:spAutoFit/>
+          <a:bodyPr wrap="none" anchor="t" tIns="91440">
+            <a:noAutofit/>
           </a:bodyPr>
           <a:lstStyle/>
           <a:p>
@@ -7864,8 +8037,8 @@
         </p:nvSpPr>
         <p:spPr>
           <a:xfrm>
-            <a:off x="457200" y="457200"/>
-            <a:ext cx="11277295" cy="822960"/>
+            <a:off x="457200" y="365760"/>
+            <a:ext cx="11277295" cy="914400"/>
           </a:xfrm>
           <a:prstGeom prst="rect">
             <a:avLst/>
@@ -7873,14 +8046,14 @@
           <a:noFill/>
         </p:spPr>
         <p:txBody>
-          <a:bodyPr wrap="square" lIns="45720" rIns="45720" tIns="18288" bIns="18288">
-            <a:spAutoFit/>
+          <a:bodyPr wrap="square" anchor="ctr" lIns="0" rIns="0" tIns="0" bIns="0">
+            <a:noAutofit/>
           </a:bodyPr>
           <a:lstStyle/>
           <a:p>
             <a:pPr algn="l"/>
             <a:r>
-              <a:rPr sz="3000" b="1">
+              <a:rPr sz="2800" b="1" i="0">
                 <a:solidFill>
                   <a:srgbClr val="1F4E78"/>
                 </a:solidFill>
@@ -7898,8 +8071,8 @@
         </p:nvSpPr>
         <p:spPr>
           <a:xfrm>
-            <a:off x="457200" y="1234440"/>
-            <a:ext cx="1828800" cy="36576"/>
+            <a:off x="457200" y="1298448"/>
+            <a:ext cx="2194560" cy="36576"/>
           </a:xfrm>
           <a:prstGeom prst="rect">
             <a:avLst/>
@@ -7941,8 +8114,8 @@
         </p:nvSpPr>
         <p:spPr>
           <a:xfrm>
-            <a:off x="822960" y="1463040"/>
-            <a:ext cx="10545775" cy="4892040"/>
+            <a:off x="822960" y="2148840"/>
+            <a:ext cx="10545775" cy="4114800"/>
           </a:xfrm>
           <a:prstGeom prst="rect">
             <a:avLst/>
@@ -7950,15 +8123,18 @@
           <a:noFill/>
         </p:spPr>
         <p:txBody>
-          <a:bodyPr wrap="square" lIns="45720" rIns="45720">
-            <a:spAutoFit/>
+          <a:bodyPr wrap="square" anchor="t" lIns="0" rIns="0" tIns="0" bIns="0">
+            <a:noAutofit/>
           </a:bodyPr>
           <a:lstStyle/>
           <a:p>
             <a:pPr algn="l">
               <a:lnSpc>
-                <a:spcPct val="130000"/>
+                <a:spcPct val="135000"/>
               </a:lnSpc>
+              <a:spcAft>
+                <a:spcPts val="600"/>
+              </a:spcAft>
             </a:pPr>
             <a:r>
               <a:rPr sz="2200">
@@ -8049,14 +8225,14 @@
           <a:noFill/>
         </p:spPr>
         <p:txBody>
-          <a:bodyPr wrap="square" lIns="45720" rIns="45720" tIns="18288" bIns="18288">
-            <a:spAutoFit/>
+          <a:bodyPr wrap="square" anchor="ctr" lIns="0" rIns="0" tIns="0" bIns="0">
+            <a:noAutofit/>
           </a:bodyPr>
           <a:lstStyle/>
           <a:p>
             <a:pPr algn="ctr"/>
             <a:r>
-              <a:rPr sz="5800" b="1">
+              <a:rPr sz="5800" b="1" i="0">
                 <a:solidFill>
                   <a:srgbClr val="FFFFFF"/>
                 </a:solidFill>
@@ -8092,8 +8268,8 @@
         </p:nvSpPr>
         <p:spPr>
           <a:xfrm>
-            <a:off x="457200" y="457200"/>
-            <a:ext cx="11277295" cy="822960"/>
+            <a:off x="457200" y="365760"/>
+            <a:ext cx="11277295" cy="914400"/>
           </a:xfrm>
           <a:prstGeom prst="rect">
             <a:avLst/>
@@ -8101,14 +8277,14 @@
           <a:noFill/>
         </p:spPr>
         <p:txBody>
-          <a:bodyPr wrap="square" lIns="45720" rIns="45720" tIns="18288" bIns="18288">
-            <a:spAutoFit/>
+          <a:bodyPr wrap="square" anchor="ctr" lIns="0" rIns="0" tIns="0" bIns="0">
+            <a:noAutofit/>
           </a:bodyPr>
           <a:lstStyle/>
           <a:p>
             <a:pPr algn="l"/>
             <a:r>
-              <a:rPr sz="3000" b="1">
+              <a:rPr sz="2800" b="1" i="0">
                 <a:solidFill>
                   <a:srgbClr val="1F4E78"/>
                 </a:solidFill>
@@ -8126,8 +8302,8 @@
         </p:nvSpPr>
         <p:spPr>
           <a:xfrm>
-            <a:off x="457200" y="1234440"/>
-            <a:ext cx="1828800" cy="36576"/>
+            <a:off x="457200" y="1298448"/>
+            <a:ext cx="2194560" cy="36576"/>
           </a:xfrm>
           <a:prstGeom prst="rect">
             <a:avLst/>
@@ -8169,8 +8345,8 @@
         </p:nvSpPr>
         <p:spPr>
           <a:xfrm>
-            <a:off x="457200" y="1463040"/>
-            <a:ext cx="11277295" cy="640080"/>
+            <a:off x="457200" y="1508760"/>
+            <a:ext cx="11277295" cy="502920"/>
           </a:xfrm>
           <a:prstGeom prst="rect">
             <a:avLst/>
@@ -8178,14 +8354,14 @@
           <a:noFill/>
         </p:spPr>
         <p:txBody>
-          <a:bodyPr wrap="square" lIns="45720" rIns="45720" tIns="18288" bIns="18288">
-            <a:spAutoFit/>
+          <a:bodyPr wrap="square" anchor="ctr" lIns="0" rIns="0" tIns="0" bIns="0">
+            <a:noAutofit/>
           </a:bodyPr>
           <a:lstStyle/>
           <a:p>
             <a:pPr algn="l"/>
             <a:r>
-              <a:rPr sz="2200" b="1">
+              <a:rPr sz="2000" b="1" i="0">
                 <a:solidFill>
                   <a:srgbClr val="C0392B"/>
                 </a:solidFill>
@@ -8203,8 +8379,8 @@
         </p:nvSpPr>
         <p:spPr>
           <a:xfrm>
-            <a:off x="640080" y="2286000"/>
-            <a:ext cx="10911535" cy="4069080"/>
+            <a:off x="640080" y="2148840"/>
+            <a:ext cx="10911535" cy="4114800"/>
           </a:xfrm>
           <a:prstGeom prst="rect">
             <a:avLst/>
@@ -8212,15 +8388,18 @@
           <a:noFill/>
         </p:spPr>
         <p:txBody>
-          <a:bodyPr wrap="square" lIns="45720" rIns="45720">
-            <a:spAutoFit/>
+          <a:bodyPr wrap="square" anchor="t" lIns="0" rIns="0" tIns="0" bIns="0">
+            <a:noAutofit/>
           </a:bodyPr>
           <a:lstStyle/>
           <a:p>
             <a:pPr algn="l">
               <a:lnSpc>
-                <a:spcPct val="130000"/>
+                <a:spcPct val="135000"/>
               </a:lnSpc>
+              <a:spcAft>
+                <a:spcPts val="600"/>
+              </a:spcAft>
             </a:pPr>
             <a:r>
               <a:rPr sz="1800">
@@ -8234,8 +8413,11 @@
           <a:p>
             <a:pPr algn="l">
               <a:lnSpc>
-                <a:spcPct val="130000"/>
+                <a:spcPct val="135000"/>
               </a:lnSpc>
+              <a:spcAft>
+                <a:spcPts val="600"/>
+              </a:spcAft>
             </a:pPr>
             <a:r>
               <a:rPr sz="1800">
@@ -8249,8 +8431,11 @@
           <a:p>
             <a:pPr algn="l">
               <a:lnSpc>
-                <a:spcPct val="130000"/>
+                <a:spcPct val="135000"/>
               </a:lnSpc>
+              <a:spcAft>
+                <a:spcPts val="600"/>
+              </a:spcAft>
             </a:pPr>
             <a:r>
               <a:rPr sz="1800">
@@ -8264,8 +8449,11 @@
           <a:p>
             <a:pPr algn="l">
               <a:lnSpc>
-                <a:spcPct val="130000"/>
+                <a:spcPct val="135000"/>
               </a:lnSpc>
+              <a:spcAft>
+                <a:spcPts val="600"/>
+              </a:spcAft>
             </a:pPr>
             <a:r>
               <a:rPr sz="1800">
@@ -8304,8 +8492,8 @@
         </p:nvSpPr>
         <p:spPr>
           <a:xfrm>
-            <a:off x="457200" y="457200"/>
-            <a:ext cx="11277295" cy="822960"/>
+            <a:off x="457200" y="365760"/>
+            <a:ext cx="11277295" cy="914400"/>
           </a:xfrm>
           <a:prstGeom prst="rect">
             <a:avLst/>
@@ -8313,14 +8501,14 @@
           <a:noFill/>
         </p:spPr>
         <p:txBody>
-          <a:bodyPr wrap="square" lIns="45720" rIns="45720" tIns="18288" bIns="18288">
-            <a:spAutoFit/>
+          <a:bodyPr wrap="square" anchor="ctr" lIns="0" rIns="0" tIns="0" bIns="0">
+            <a:noAutofit/>
           </a:bodyPr>
           <a:lstStyle/>
           <a:p>
             <a:pPr algn="l"/>
             <a:r>
-              <a:rPr sz="3000" b="1">
+              <a:rPr sz="2800" b="1" i="0">
                 <a:solidFill>
                   <a:srgbClr val="1F4E78"/>
                 </a:solidFill>
@@ -8338,8 +8526,8 @@
         </p:nvSpPr>
         <p:spPr>
           <a:xfrm>
-            <a:off x="457200" y="1234440"/>
-            <a:ext cx="1828800" cy="36576"/>
+            <a:off x="457200" y="1298448"/>
+            <a:ext cx="2194560" cy="36576"/>
           </a:xfrm>
           <a:prstGeom prst="rect">
             <a:avLst/>
@@ -8381,8 +8569,8 @@
         </p:nvSpPr>
         <p:spPr>
           <a:xfrm>
-            <a:off x="457200" y="1463040"/>
-            <a:ext cx="11277295" cy="640080"/>
+            <a:off x="457200" y="1508760"/>
+            <a:ext cx="11277295" cy="502920"/>
           </a:xfrm>
           <a:prstGeom prst="rect">
             <a:avLst/>
@@ -8390,14 +8578,14 @@
           <a:noFill/>
         </p:spPr>
         <p:txBody>
-          <a:bodyPr wrap="square" lIns="45720" rIns="45720" tIns="18288" bIns="18288">
-            <a:spAutoFit/>
+          <a:bodyPr wrap="square" anchor="ctr" lIns="0" rIns="0" tIns="0" bIns="0">
+            <a:noAutofit/>
           </a:bodyPr>
           <a:lstStyle/>
           <a:p>
             <a:pPr algn="l"/>
             <a:r>
-              <a:rPr sz="2200" b="1">
+              <a:rPr sz="2000" b="1" i="0">
                 <a:solidFill>
                   <a:srgbClr val="C0392B"/>
                 </a:solidFill>
@@ -8416,7 +8604,7 @@
           <p:nvPr/>
         </p:nvGraphicFramePr>
         <p:xfrm>
-          <a:off x="457200" y="2286000"/>
+          <a:off x="457200" y="2148840"/>
           <a:ext cx="11277295" cy="1828800"/>
         </p:xfrm>
         <a:graphic>
@@ -8723,14 +8911,14 @@
           <a:noFill/>
         </p:spPr>
         <p:txBody>
-          <a:bodyPr wrap="square" lIns="45720" rIns="45720" tIns="18288" bIns="18288">
-            <a:spAutoFit/>
+          <a:bodyPr wrap="square" anchor="ctr" lIns="0" rIns="0" tIns="0" bIns="0">
+            <a:noAutofit/>
           </a:bodyPr>
           <a:lstStyle/>
           <a:p>
             <a:pPr algn="l"/>
             <a:r>
-              <a:rPr sz="1100" b="0">
+              <a:rPr sz="1100" b="0" i="1">
                 <a:solidFill>
                   <a:srgbClr val="808080"/>
                 </a:solidFill>
@@ -8766,8 +8954,8 @@
         </p:nvSpPr>
         <p:spPr>
           <a:xfrm>
-            <a:off x="457200" y="457200"/>
-            <a:ext cx="11277295" cy="822960"/>
+            <a:off x="457200" y="365760"/>
+            <a:ext cx="11277295" cy="914400"/>
           </a:xfrm>
           <a:prstGeom prst="rect">
             <a:avLst/>
@@ -8775,14 +8963,14 @@
           <a:noFill/>
         </p:spPr>
         <p:txBody>
-          <a:bodyPr wrap="square" lIns="45720" rIns="45720" tIns="18288" bIns="18288">
-            <a:spAutoFit/>
+          <a:bodyPr wrap="square" anchor="ctr" lIns="0" rIns="0" tIns="0" bIns="0">
+            <a:noAutofit/>
           </a:bodyPr>
           <a:lstStyle/>
           <a:p>
             <a:pPr algn="l"/>
             <a:r>
-              <a:rPr sz="3000" b="1">
+              <a:rPr sz="2800" b="1" i="0">
                 <a:solidFill>
                   <a:srgbClr val="1F4E78"/>
                 </a:solidFill>
@@ -8800,8 +8988,8 @@
         </p:nvSpPr>
         <p:spPr>
           <a:xfrm>
-            <a:off x="457200" y="1234440"/>
-            <a:ext cx="1828800" cy="36576"/>
+            <a:off x="457200" y="1298448"/>
+            <a:ext cx="2194560" cy="36576"/>
           </a:xfrm>
           <a:prstGeom prst="rect">
             <a:avLst/>
@@ -8843,8 +9031,8 @@
         </p:nvSpPr>
         <p:spPr>
           <a:xfrm>
-            <a:off x="457200" y="1463040"/>
-            <a:ext cx="11277295" cy="640080"/>
+            <a:off x="457200" y="1508760"/>
+            <a:ext cx="11277295" cy="502920"/>
           </a:xfrm>
           <a:prstGeom prst="rect">
             <a:avLst/>
@@ -8852,14 +9040,14 @@
           <a:noFill/>
         </p:spPr>
         <p:txBody>
-          <a:bodyPr wrap="square" lIns="45720" rIns="45720" tIns="18288" bIns="18288">
-            <a:spAutoFit/>
+          <a:bodyPr wrap="square" anchor="ctr" lIns="0" rIns="0" tIns="0" bIns="0">
+            <a:noAutofit/>
           </a:bodyPr>
           <a:lstStyle/>
           <a:p>
             <a:pPr algn="l"/>
             <a:r>
-              <a:rPr sz="2200" b="1">
+              <a:rPr sz="2000" b="1" i="0">
                 <a:solidFill>
                   <a:srgbClr val="C0392B"/>
                 </a:solidFill>
@@ -8877,8 +9065,8 @@
         </p:nvSpPr>
         <p:spPr>
           <a:xfrm>
-            <a:off x="640080" y="2286000"/>
-            <a:ext cx="10911535" cy="4069080"/>
+            <a:off x="640080" y="2148840"/>
+            <a:ext cx="10911535" cy="4114800"/>
           </a:xfrm>
           <a:prstGeom prst="rect">
             <a:avLst/>
@@ -8886,15 +9074,18 @@
           <a:noFill/>
         </p:spPr>
         <p:txBody>
-          <a:bodyPr wrap="square" lIns="45720" rIns="45720">
-            <a:spAutoFit/>
+          <a:bodyPr wrap="square" anchor="t" lIns="0" rIns="0" tIns="0" bIns="0">
+            <a:noAutofit/>
           </a:bodyPr>
           <a:lstStyle/>
           <a:p>
             <a:pPr algn="l">
               <a:lnSpc>
-                <a:spcPct val="130000"/>
+                <a:spcPct val="135000"/>
               </a:lnSpc>
+              <a:spcAft>
+                <a:spcPts val="600"/>
+              </a:spcAft>
             </a:pPr>
             <a:r>
               <a:rPr sz="1800">
@@ -8908,8 +9099,11 @@
           <a:p>
             <a:pPr algn="l">
               <a:lnSpc>
-                <a:spcPct val="130000"/>
+                <a:spcPct val="135000"/>
               </a:lnSpc>
+              <a:spcAft>
+                <a:spcPts val="600"/>
+              </a:spcAft>
             </a:pPr>
             <a:r>
               <a:rPr sz="1800">
@@ -8923,8 +9117,11 @@
           <a:p>
             <a:pPr algn="l">
               <a:lnSpc>
-                <a:spcPct val="130000"/>
+                <a:spcPct val="135000"/>
               </a:lnSpc>
+              <a:spcAft>
+                <a:spcPts val="600"/>
+              </a:spcAft>
             </a:pPr>
             <a:r>
               <a:rPr sz="1800">
@@ -8938,8 +9135,11 @@
           <a:p>
             <a:pPr algn="l">
               <a:lnSpc>
-                <a:spcPct val="130000"/>
+                <a:spcPct val="135000"/>
               </a:lnSpc>
+              <a:spcAft>
+                <a:spcPts val="600"/>
+              </a:spcAft>
             </a:pPr>
             <a:r>
               <a:rPr sz="1800">
@@ -8978,8 +9178,8 @@
         </p:nvSpPr>
         <p:spPr>
           <a:xfrm>
-            <a:off x="457200" y="457200"/>
-            <a:ext cx="11277295" cy="822960"/>
+            <a:off x="457200" y="365760"/>
+            <a:ext cx="11277295" cy="914400"/>
           </a:xfrm>
           <a:prstGeom prst="rect">
             <a:avLst/>
@@ -8987,14 +9187,14 @@
           <a:noFill/>
         </p:spPr>
         <p:txBody>
-          <a:bodyPr wrap="square" lIns="45720" rIns="45720" tIns="18288" bIns="18288">
-            <a:spAutoFit/>
+          <a:bodyPr wrap="square" anchor="ctr" lIns="0" rIns="0" tIns="0" bIns="0">
+            <a:noAutofit/>
           </a:bodyPr>
           <a:lstStyle/>
           <a:p>
             <a:pPr algn="l"/>
             <a:r>
-              <a:rPr sz="3000" b="1">
+              <a:rPr sz="2800" b="1" i="0">
                 <a:solidFill>
                   <a:srgbClr val="1F4E78"/>
                 </a:solidFill>
@@ -9012,8 +9212,8 @@
         </p:nvSpPr>
         <p:spPr>
           <a:xfrm>
-            <a:off x="457200" y="1234440"/>
-            <a:ext cx="1828800" cy="36576"/>
+            <a:off x="457200" y="1298448"/>
+            <a:ext cx="2194560" cy="36576"/>
           </a:xfrm>
           <a:prstGeom prst="rect">
             <a:avLst/>
@@ -9055,8 +9255,8 @@
         </p:nvSpPr>
         <p:spPr>
           <a:xfrm>
-            <a:off x="822960" y="1463040"/>
-            <a:ext cx="10545775" cy="4892040"/>
+            <a:off x="822960" y="2148840"/>
+            <a:ext cx="10545775" cy="4114800"/>
           </a:xfrm>
           <a:prstGeom prst="rect">
             <a:avLst/>
@@ -9064,15 +9264,18 @@
           <a:noFill/>
         </p:spPr>
         <p:txBody>
-          <a:bodyPr wrap="square" lIns="45720" rIns="45720">
-            <a:spAutoFit/>
+          <a:bodyPr wrap="square" anchor="t" lIns="0" rIns="0" tIns="0" bIns="0">
+            <a:noAutofit/>
           </a:bodyPr>
           <a:lstStyle/>
           <a:p>
             <a:pPr algn="l">
               <a:lnSpc>
-                <a:spcPct val="130000"/>
+                <a:spcPct val="135000"/>
               </a:lnSpc>
+              <a:spcAft>
+                <a:spcPts val="600"/>
+              </a:spcAft>
             </a:pPr>
             <a:r>
               <a:rPr sz="2200">
@@ -9163,14 +9366,14 @@
           <a:noFill/>
         </p:spPr>
         <p:txBody>
-          <a:bodyPr wrap="square" lIns="45720" rIns="45720" tIns="18288" bIns="18288">
-            <a:spAutoFit/>
+          <a:bodyPr wrap="square" anchor="ctr" lIns="0" rIns="0" tIns="0" bIns="0">
+            <a:noAutofit/>
           </a:bodyPr>
           <a:lstStyle/>
           <a:p>
             <a:pPr algn="ctr"/>
             <a:r>
-              <a:rPr sz="5800" b="1">
+              <a:rPr sz="5800" b="1" i="0">
                 <a:solidFill>
                   <a:srgbClr val="FFFFFF"/>
                 </a:solidFill>
@@ -9206,8 +9409,8 @@
         </p:nvSpPr>
         <p:spPr>
           <a:xfrm>
-            <a:off x="457200" y="457200"/>
-            <a:ext cx="11277295" cy="822960"/>
+            <a:off x="457200" y="365760"/>
+            <a:ext cx="11277295" cy="914400"/>
           </a:xfrm>
           <a:prstGeom prst="rect">
             <a:avLst/>
@@ -9215,14 +9418,14 @@
           <a:noFill/>
         </p:spPr>
         <p:txBody>
-          <a:bodyPr wrap="square" lIns="45720" rIns="45720" tIns="18288" bIns="18288">
-            <a:spAutoFit/>
+          <a:bodyPr wrap="square" anchor="ctr" lIns="0" rIns="0" tIns="0" bIns="0">
+            <a:noAutofit/>
           </a:bodyPr>
           <a:lstStyle/>
           <a:p>
             <a:pPr algn="l"/>
             <a:r>
-              <a:rPr sz="3000" b="1">
+              <a:rPr sz="2800" b="1" i="0">
                 <a:solidFill>
                   <a:srgbClr val="1F4E78"/>
                 </a:solidFill>
@@ -9240,8 +9443,8 @@
         </p:nvSpPr>
         <p:spPr>
           <a:xfrm>
-            <a:off x="457200" y="1234440"/>
-            <a:ext cx="1828800" cy="36576"/>
+            <a:off x="457200" y="1298448"/>
+            <a:ext cx="2194560" cy="36576"/>
           </a:xfrm>
           <a:prstGeom prst="rect">
             <a:avLst/>
@@ -9283,8 +9486,8 @@
         </p:nvSpPr>
         <p:spPr>
           <a:xfrm>
-            <a:off x="457200" y="1463040"/>
-            <a:ext cx="11277295" cy="640080"/>
+            <a:off x="457200" y="1508760"/>
+            <a:ext cx="11277295" cy="502920"/>
           </a:xfrm>
           <a:prstGeom prst="rect">
             <a:avLst/>
@@ -9292,14 +9495,14 @@
           <a:noFill/>
         </p:spPr>
         <p:txBody>
-          <a:bodyPr wrap="square" lIns="45720" rIns="45720" tIns="18288" bIns="18288">
-            <a:spAutoFit/>
+          <a:bodyPr wrap="square" anchor="ctr" lIns="0" rIns="0" tIns="0" bIns="0">
+            <a:noAutofit/>
           </a:bodyPr>
           <a:lstStyle/>
           <a:p>
             <a:pPr algn="l"/>
             <a:r>
-              <a:rPr sz="2200" b="1">
+              <a:rPr sz="2000" b="1" i="0">
                 <a:solidFill>
                   <a:srgbClr val="C0392B"/>
                 </a:solidFill>
@@ -9318,7 +9521,7 @@
           <p:nvPr/>
         </p:nvGraphicFramePr>
         <p:xfrm>
-          <a:off x="457200" y="2286000"/>
+          <a:off x="457200" y="2148840"/>
           <a:ext cx="11277295" cy="2743200"/>
         </p:xfrm>
         <a:graphic>
@@ -10027,14 +10230,14 @@
           <a:noFill/>
         </p:spPr>
         <p:txBody>
-          <a:bodyPr wrap="square" lIns="45720" rIns="45720" tIns="18288" bIns="18288">
-            <a:spAutoFit/>
+          <a:bodyPr wrap="square" anchor="ctr" lIns="0" rIns="0" tIns="0" bIns="0">
+            <a:noAutofit/>
           </a:bodyPr>
           <a:lstStyle/>
           <a:p>
             <a:pPr algn="l"/>
             <a:r>
-              <a:rPr sz="1100" b="0">
+              <a:rPr sz="1100" b="0" i="1">
                 <a:solidFill>
                   <a:srgbClr val="808080"/>
                 </a:solidFill>
@@ -10070,8 +10273,8 @@
         </p:nvSpPr>
         <p:spPr>
           <a:xfrm>
-            <a:off x="457200" y="457200"/>
-            <a:ext cx="11277295" cy="822960"/>
+            <a:off x="457200" y="365760"/>
+            <a:ext cx="11277295" cy="914400"/>
           </a:xfrm>
           <a:prstGeom prst="rect">
             <a:avLst/>
@@ -10079,14 +10282,14 @@
           <a:noFill/>
         </p:spPr>
         <p:txBody>
-          <a:bodyPr wrap="square" lIns="45720" rIns="45720" tIns="18288" bIns="18288">
-            <a:spAutoFit/>
+          <a:bodyPr wrap="square" anchor="ctr" lIns="0" rIns="0" tIns="0" bIns="0">
+            <a:noAutofit/>
           </a:bodyPr>
           <a:lstStyle/>
           <a:p>
             <a:pPr algn="l"/>
             <a:r>
-              <a:rPr sz="3000" b="1">
+              <a:rPr sz="2800" b="1" i="0">
                 <a:solidFill>
                   <a:srgbClr val="1F4E78"/>
                 </a:solidFill>
@@ -10104,8 +10307,8 @@
         </p:nvSpPr>
         <p:spPr>
           <a:xfrm>
-            <a:off x="457200" y="1234440"/>
-            <a:ext cx="1828800" cy="36576"/>
+            <a:off x="457200" y="1298448"/>
+            <a:ext cx="2194560" cy="36576"/>
           </a:xfrm>
           <a:prstGeom prst="rect">
             <a:avLst/>
@@ -10147,8 +10350,8 @@
         </p:nvSpPr>
         <p:spPr>
           <a:xfrm>
-            <a:off x="457200" y="1463040"/>
-            <a:ext cx="11277295" cy="640080"/>
+            <a:off x="457200" y="1508760"/>
+            <a:ext cx="11277295" cy="502920"/>
           </a:xfrm>
           <a:prstGeom prst="rect">
             <a:avLst/>
@@ -10156,14 +10359,14 @@
           <a:noFill/>
         </p:spPr>
         <p:txBody>
-          <a:bodyPr wrap="square" lIns="45720" rIns="45720" tIns="18288" bIns="18288">
-            <a:spAutoFit/>
+          <a:bodyPr wrap="square" anchor="ctr" lIns="0" rIns="0" tIns="0" bIns="0">
+            <a:noAutofit/>
           </a:bodyPr>
           <a:lstStyle/>
           <a:p>
             <a:pPr algn="l"/>
             <a:r>
-              <a:rPr sz="2200" b="1">
+              <a:rPr sz="2000" b="1" i="0">
                 <a:solidFill>
                   <a:srgbClr val="C0392B"/>
                 </a:solidFill>
@@ -10181,8 +10384,8 @@
         </p:nvSpPr>
         <p:spPr>
           <a:xfrm>
-            <a:off x="640080" y="2286000"/>
-            <a:ext cx="10911535" cy="4069080"/>
+            <a:off x="640080" y="2148840"/>
+            <a:ext cx="10911535" cy="4114800"/>
           </a:xfrm>
           <a:prstGeom prst="rect">
             <a:avLst/>
@@ -10190,15 +10393,18 @@
           <a:noFill/>
         </p:spPr>
         <p:txBody>
-          <a:bodyPr wrap="square" lIns="45720" rIns="45720">
-            <a:spAutoFit/>
+          <a:bodyPr wrap="square" anchor="t" lIns="0" rIns="0" tIns="0" bIns="0">
+            <a:noAutofit/>
           </a:bodyPr>
           <a:lstStyle/>
           <a:p>
             <a:pPr algn="l">
               <a:lnSpc>
-                <a:spcPct val="130000"/>
+                <a:spcPct val="135000"/>
               </a:lnSpc>
+              <a:spcAft>
+                <a:spcPts val="600"/>
+              </a:spcAft>
             </a:pPr>
             <a:r>
               <a:rPr sz="1800">
@@ -10212,8 +10418,11 @@
           <a:p>
             <a:pPr algn="l">
               <a:lnSpc>
-                <a:spcPct val="130000"/>
+                <a:spcPct val="135000"/>
               </a:lnSpc>
+              <a:spcAft>
+                <a:spcPts val="600"/>
+              </a:spcAft>
             </a:pPr>
             <a:r>
               <a:rPr sz="1800">
@@ -10227,8 +10436,11 @@
           <a:p>
             <a:pPr algn="l">
               <a:lnSpc>
-                <a:spcPct val="130000"/>
+                <a:spcPct val="135000"/>
               </a:lnSpc>
+              <a:spcAft>
+                <a:spcPts val="600"/>
+              </a:spcAft>
             </a:pPr>
             <a:r>
               <a:rPr sz="1800">
@@ -10267,8 +10479,8 @@
         </p:nvSpPr>
         <p:spPr>
           <a:xfrm>
-            <a:off x="457200" y="457200"/>
-            <a:ext cx="11277295" cy="822960"/>
+            <a:off x="457200" y="365760"/>
+            <a:ext cx="11277295" cy="914400"/>
           </a:xfrm>
           <a:prstGeom prst="rect">
             <a:avLst/>
@@ -10276,14 +10488,14 @@
           <a:noFill/>
         </p:spPr>
         <p:txBody>
-          <a:bodyPr wrap="square" lIns="45720" rIns="45720" tIns="18288" bIns="18288">
-            <a:spAutoFit/>
+          <a:bodyPr wrap="square" anchor="ctr" lIns="0" rIns="0" tIns="0" bIns="0">
+            <a:noAutofit/>
           </a:bodyPr>
           <a:lstStyle/>
           <a:p>
             <a:pPr algn="l"/>
             <a:r>
-              <a:rPr sz="3000" b="1">
+              <a:rPr sz="2800" b="1" i="0">
                 <a:solidFill>
                   <a:srgbClr val="1F4E78"/>
                 </a:solidFill>
@@ -10301,8 +10513,8 @@
         </p:nvSpPr>
         <p:spPr>
           <a:xfrm>
-            <a:off x="457200" y="1234440"/>
-            <a:ext cx="1828800" cy="36576"/>
+            <a:off x="457200" y="1298448"/>
+            <a:ext cx="2194560" cy="36576"/>
           </a:xfrm>
           <a:prstGeom prst="rect">
             <a:avLst/>
@@ -10344,8 +10556,8 @@
         </p:nvSpPr>
         <p:spPr>
           <a:xfrm>
-            <a:off x="822960" y="1463040"/>
-            <a:ext cx="10545775" cy="4892040"/>
+            <a:off x="822960" y="2148840"/>
+            <a:ext cx="10545775" cy="4114800"/>
           </a:xfrm>
           <a:prstGeom prst="rect">
             <a:avLst/>
@@ -10353,15 +10565,18 @@
           <a:noFill/>
         </p:spPr>
         <p:txBody>
-          <a:bodyPr wrap="square" lIns="45720" rIns="45720">
-            <a:spAutoFit/>
+          <a:bodyPr wrap="square" anchor="t" lIns="0" rIns="0" tIns="0" bIns="0">
+            <a:noAutofit/>
           </a:bodyPr>
           <a:lstStyle/>
           <a:p>
             <a:pPr algn="l">
               <a:lnSpc>
-                <a:spcPct val="130000"/>
+                <a:spcPct val="135000"/>
               </a:lnSpc>
+              <a:spcAft>
+                <a:spcPts val="600"/>
+              </a:spcAft>
             </a:pPr>
             <a:r>
               <a:rPr sz="2200">
@@ -10400,8 +10615,8 @@
         </p:nvSpPr>
         <p:spPr>
           <a:xfrm>
-            <a:off x="457200" y="457200"/>
-            <a:ext cx="11277295" cy="822960"/>
+            <a:off x="457200" y="365760"/>
+            <a:ext cx="11277295" cy="914400"/>
           </a:xfrm>
           <a:prstGeom prst="rect">
             <a:avLst/>
@@ -10409,14 +10624,14 @@
           <a:noFill/>
         </p:spPr>
         <p:txBody>
-          <a:bodyPr wrap="square" lIns="45720" rIns="45720" tIns="18288" bIns="18288">
-            <a:spAutoFit/>
+          <a:bodyPr wrap="square" anchor="ctr" lIns="0" rIns="0" tIns="0" bIns="0">
+            <a:noAutofit/>
           </a:bodyPr>
           <a:lstStyle/>
           <a:p>
             <a:pPr algn="l"/>
             <a:r>
-              <a:rPr sz="3000" b="1">
+              <a:rPr sz="2800" b="1" i="0">
                 <a:solidFill>
                   <a:srgbClr val="1F4E78"/>
                 </a:solidFill>
@@ -10434,8 +10649,8 @@
         </p:nvSpPr>
         <p:spPr>
           <a:xfrm>
-            <a:off x="457200" y="1234440"/>
-            <a:ext cx="1828800" cy="36576"/>
+            <a:off x="457200" y="1298448"/>
+            <a:ext cx="2194560" cy="36576"/>
           </a:xfrm>
           <a:prstGeom prst="rect">
             <a:avLst/>
@@ -10477,8 +10692,8 @@
         </p:nvSpPr>
         <p:spPr>
           <a:xfrm>
-            <a:off x="457200" y="1463040"/>
-            <a:ext cx="11277295" cy="640080"/>
+            <a:off x="457200" y="1508760"/>
+            <a:ext cx="11277295" cy="502920"/>
           </a:xfrm>
           <a:prstGeom prst="rect">
             <a:avLst/>
@@ -10486,14 +10701,14 @@
           <a:noFill/>
         </p:spPr>
         <p:txBody>
-          <a:bodyPr wrap="square" lIns="45720" rIns="45720" tIns="18288" bIns="18288">
-            <a:spAutoFit/>
+          <a:bodyPr wrap="square" anchor="ctr" lIns="0" rIns="0" tIns="0" bIns="0">
+            <a:noAutofit/>
           </a:bodyPr>
           <a:lstStyle/>
           <a:p>
             <a:pPr algn="l"/>
             <a:r>
-              <a:rPr sz="2200" b="1">
+              <a:rPr sz="2000" b="1" i="0">
                 <a:solidFill>
                   <a:srgbClr val="C0392B"/>
                 </a:solidFill>
@@ -10512,7 +10727,7 @@
           <p:nvPr/>
         </p:nvGraphicFramePr>
         <p:xfrm>
-          <a:off x="457200" y="2286000"/>
+          <a:off x="457200" y="2148840"/>
           <a:ext cx="11277295" cy="2286000"/>
         </p:xfrm>
         <a:graphic>
@@ -10998,14 +11213,14 @@
           <a:noFill/>
         </p:spPr>
         <p:txBody>
-          <a:bodyPr wrap="square" lIns="45720" rIns="45720" tIns="18288" bIns="18288">
-            <a:spAutoFit/>
+          <a:bodyPr wrap="square" anchor="ctr" lIns="0" rIns="0" tIns="0" bIns="0">
+            <a:noAutofit/>
           </a:bodyPr>
           <a:lstStyle/>
           <a:p>
             <a:pPr algn="l"/>
             <a:r>
-              <a:rPr sz="1100" b="0">
+              <a:rPr sz="1100" b="0" i="1">
                 <a:solidFill>
                   <a:srgbClr val="808080"/>
                 </a:solidFill>
@@ -11093,14 +11308,14 @@
           <a:noFill/>
         </p:spPr>
         <p:txBody>
-          <a:bodyPr wrap="square" lIns="45720" rIns="45720" tIns="18288" bIns="18288">
-            <a:spAutoFit/>
+          <a:bodyPr wrap="square" anchor="ctr" lIns="0" rIns="0" tIns="0" bIns="0">
+            <a:noAutofit/>
           </a:bodyPr>
           <a:lstStyle/>
           <a:p>
             <a:pPr algn="ctr"/>
             <a:r>
-              <a:rPr sz="5800" b="1">
+              <a:rPr sz="5800" b="1" i="0">
                 <a:solidFill>
                   <a:srgbClr val="FFFFFF"/>
                 </a:solidFill>
@@ -11136,8 +11351,8 @@
         </p:nvSpPr>
         <p:spPr>
           <a:xfrm>
-            <a:off x="457200" y="457200"/>
-            <a:ext cx="11277295" cy="822960"/>
+            <a:off x="457200" y="365760"/>
+            <a:ext cx="11277295" cy="914400"/>
           </a:xfrm>
           <a:prstGeom prst="rect">
             <a:avLst/>
@@ -11145,14 +11360,14 @@
           <a:noFill/>
         </p:spPr>
         <p:txBody>
-          <a:bodyPr wrap="square" lIns="45720" rIns="45720" tIns="18288" bIns="18288">
-            <a:spAutoFit/>
+          <a:bodyPr wrap="square" anchor="ctr" lIns="0" rIns="0" tIns="0" bIns="0">
+            <a:noAutofit/>
           </a:bodyPr>
           <a:lstStyle/>
           <a:p>
             <a:pPr algn="l"/>
             <a:r>
-              <a:rPr sz="3000" b="1">
+              <a:rPr sz="2800" b="1" i="0">
                 <a:solidFill>
                   <a:srgbClr val="1F4E78"/>
                 </a:solidFill>
@@ -11170,8 +11385,8 @@
         </p:nvSpPr>
         <p:spPr>
           <a:xfrm>
-            <a:off x="457200" y="1234440"/>
-            <a:ext cx="1828800" cy="36576"/>
+            <a:off x="457200" y="1298448"/>
+            <a:ext cx="2194560" cy="36576"/>
           </a:xfrm>
           <a:prstGeom prst="rect">
             <a:avLst/>
@@ -11213,8 +11428,8 @@
         </p:nvSpPr>
         <p:spPr>
           <a:xfrm>
-            <a:off x="457200" y="1463040"/>
-            <a:ext cx="11277295" cy="640080"/>
+            <a:off x="457200" y="1508760"/>
+            <a:ext cx="11277295" cy="502920"/>
           </a:xfrm>
           <a:prstGeom prst="rect">
             <a:avLst/>
@@ -11222,14 +11437,14 @@
           <a:noFill/>
         </p:spPr>
         <p:txBody>
-          <a:bodyPr wrap="square" lIns="45720" rIns="45720" tIns="18288" bIns="18288">
-            <a:spAutoFit/>
+          <a:bodyPr wrap="square" anchor="ctr" lIns="0" rIns="0" tIns="0" bIns="0">
+            <a:noAutofit/>
           </a:bodyPr>
           <a:lstStyle/>
           <a:p>
             <a:pPr algn="l"/>
             <a:r>
-              <a:rPr sz="2200" b="1">
+              <a:rPr sz="2000" b="1" i="0">
                 <a:solidFill>
                   <a:srgbClr val="C0392B"/>
                 </a:solidFill>
@@ -11247,8 +11462,8 @@
         </p:nvSpPr>
         <p:spPr>
           <a:xfrm>
-            <a:off x="640080" y="2286000"/>
-            <a:ext cx="10911535" cy="4069080"/>
+            <a:off x="640080" y="2148840"/>
+            <a:ext cx="10911535" cy="4114800"/>
           </a:xfrm>
           <a:prstGeom prst="rect">
             <a:avLst/>
@@ -11256,15 +11471,18 @@
           <a:noFill/>
         </p:spPr>
         <p:txBody>
-          <a:bodyPr wrap="square" lIns="45720" rIns="45720">
-            <a:spAutoFit/>
+          <a:bodyPr wrap="square" anchor="t" lIns="0" rIns="0" tIns="0" bIns="0">
+            <a:noAutofit/>
           </a:bodyPr>
           <a:lstStyle/>
           <a:p>
             <a:pPr algn="l">
               <a:lnSpc>
-                <a:spcPct val="130000"/>
+                <a:spcPct val="135000"/>
               </a:lnSpc>
+              <a:spcAft>
+                <a:spcPts val="600"/>
+              </a:spcAft>
             </a:pPr>
             <a:r>
               <a:rPr sz="1800">
@@ -11278,8 +11496,11 @@
           <a:p>
             <a:pPr algn="l">
               <a:lnSpc>
-                <a:spcPct val="130000"/>
+                <a:spcPct val="135000"/>
               </a:lnSpc>
+              <a:spcAft>
+                <a:spcPts val="600"/>
+              </a:spcAft>
             </a:pPr>
             <a:r>
               <a:rPr sz="1800">
@@ -11293,8 +11514,11 @@
           <a:p>
             <a:pPr algn="l">
               <a:lnSpc>
-                <a:spcPct val="130000"/>
+                <a:spcPct val="135000"/>
               </a:lnSpc>
+              <a:spcAft>
+                <a:spcPts val="600"/>
+              </a:spcAft>
             </a:pPr>
             <a:r>
               <a:rPr sz="1800">
@@ -11333,8 +11557,8 @@
         </p:nvSpPr>
         <p:spPr>
           <a:xfrm>
-            <a:off x="457200" y="457200"/>
-            <a:ext cx="11277295" cy="822960"/>
+            <a:off x="457200" y="365760"/>
+            <a:ext cx="11277295" cy="914400"/>
           </a:xfrm>
           <a:prstGeom prst="rect">
             <a:avLst/>
@@ -11342,14 +11566,14 @@
           <a:noFill/>
         </p:spPr>
         <p:txBody>
-          <a:bodyPr wrap="square" lIns="45720" rIns="45720" tIns="18288" bIns="18288">
-            <a:spAutoFit/>
+          <a:bodyPr wrap="square" anchor="ctr" lIns="0" rIns="0" tIns="0" bIns="0">
+            <a:noAutofit/>
           </a:bodyPr>
           <a:lstStyle/>
           <a:p>
             <a:pPr algn="l"/>
             <a:r>
-              <a:rPr sz="3000" b="1">
+              <a:rPr sz="2800" b="1" i="0">
                 <a:solidFill>
                   <a:srgbClr val="1F4E78"/>
                 </a:solidFill>
@@ -11367,8 +11591,8 @@
         </p:nvSpPr>
         <p:spPr>
           <a:xfrm>
-            <a:off x="457200" y="1234440"/>
-            <a:ext cx="1828800" cy="36576"/>
+            <a:off x="457200" y="1298448"/>
+            <a:ext cx="2194560" cy="36576"/>
           </a:xfrm>
           <a:prstGeom prst="rect">
             <a:avLst/>
@@ -11410,8 +11634,8 @@
         </p:nvSpPr>
         <p:spPr>
           <a:xfrm>
-            <a:off x="457200" y="1463040"/>
-            <a:ext cx="11277295" cy="640080"/>
+            <a:off x="457200" y="1508760"/>
+            <a:ext cx="11277295" cy="502920"/>
           </a:xfrm>
           <a:prstGeom prst="rect">
             <a:avLst/>
@@ -11419,14 +11643,14 @@
           <a:noFill/>
         </p:spPr>
         <p:txBody>
-          <a:bodyPr wrap="square" lIns="45720" rIns="45720" tIns="18288" bIns="18288">
-            <a:spAutoFit/>
+          <a:bodyPr wrap="square" anchor="ctr" lIns="0" rIns="0" tIns="0" bIns="0">
+            <a:noAutofit/>
           </a:bodyPr>
           <a:lstStyle/>
           <a:p>
             <a:pPr algn="l"/>
             <a:r>
-              <a:rPr sz="2200" b="1">
+              <a:rPr sz="2000" b="1" i="0">
                 <a:solidFill>
                   <a:srgbClr val="C0392B"/>
                 </a:solidFill>
@@ -11444,8 +11668,8 @@
         </p:nvSpPr>
         <p:spPr>
           <a:xfrm>
-            <a:off x="640080" y="2286000"/>
-            <a:ext cx="10911535" cy="4069080"/>
+            <a:off x="640080" y="2148840"/>
+            <a:ext cx="10911535" cy="4114800"/>
           </a:xfrm>
           <a:prstGeom prst="rect">
             <a:avLst/>
@@ -11453,15 +11677,18 @@
           <a:noFill/>
         </p:spPr>
         <p:txBody>
-          <a:bodyPr wrap="square" lIns="45720" rIns="45720">
-            <a:spAutoFit/>
+          <a:bodyPr wrap="square" anchor="t" lIns="0" rIns="0" tIns="0" bIns="0">
+            <a:noAutofit/>
           </a:bodyPr>
           <a:lstStyle/>
           <a:p>
             <a:pPr algn="l">
               <a:lnSpc>
-                <a:spcPct val="130000"/>
+                <a:spcPct val="135000"/>
               </a:lnSpc>
+              <a:spcAft>
+                <a:spcPts val="600"/>
+              </a:spcAft>
             </a:pPr>
             <a:r>
               <a:rPr sz="1800">
@@ -11475,8 +11702,11 @@
           <a:p>
             <a:pPr algn="l">
               <a:lnSpc>
-                <a:spcPct val="130000"/>
+                <a:spcPct val="135000"/>
               </a:lnSpc>
+              <a:spcAft>
+                <a:spcPts val="600"/>
+              </a:spcAft>
             </a:pPr>
             <a:r>
               <a:rPr sz="1800">
@@ -11490,8 +11720,11 @@
           <a:p>
             <a:pPr algn="l">
               <a:lnSpc>
-                <a:spcPct val="130000"/>
+                <a:spcPct val="135000"/>
               </a:lnSpc>
+              <a:spcAft>
+                <a:spcPts val="600"/>
+              </a:spcAft>
             </a:pPr>
             <a:r>
               <a:rPr sz="1800">
@@ -11530,8 +11763,8 @@
         </p:nvSpPr>
         <p:spPr>
           <a:xfrm>
-            <a:off x="457200" y="457200"/>
-            <a:ext cx="11277295" cy="822960"/>
+            <a:off x="457200" y="365760"/>
+            <a:ext cx="11277295" cy="914400"/>
           </a:xfrm>
           <a:prstGeom prst="rect">
             <a:avLst/>
@@ -11539,14 +11772,14 @@
           <a:noFill/>
         </p:spPr>
         <p:txBody>
-          <a:bodyPr wrap="square" lIns="45720" rIns="45720" tIns="18288" bIns="18288">
-            <a:spAutoFit/>
+          <a:bodyPr wrap="square" anchor="ctr" lIns="0" rIns="0" tIns="0" bIns="0">
+            <a:noAutofit/>
           </a:bodyPr>
           <a:lstStyle/>
           <a:p>
             <a:pPr algn="l"/>
             <a:r>
-              <a:rPr sz="3000" b="1">
+              <a:rPr sz="2800" b="1" i="0">
                 <a:solidFill>
                   <a:srgbClr val="1F4E78"/>
                 </a:solidFill>
@@ -11564,8 +11797,8 @@
         </p:nvSpPr>
         <p:spPr>
           <a:xfrm>
-            <a:off x="457200" y="1234440"/>
-            <a:ext cx="1828800" cy="36576"/>
+            <a:off x="457200" y="1298448"/>
+            <a:ext cx="2194560" cy="36576"/>
           </a:xfrm>
           <a:prstGeom prst="rect">
             <a:avLst/>
@@ -11607,8 +11840,8 @@
         </p:nvSpPr>
         <p:spPr>
           <a:xfrm>
-            <a:off x="457200" y="1463040"/>
-            <a:ext cx="11277295" cy="640080"/>
+            <a:off x="457200" y="1508760"/>
+            <a:ext cx="11277295" cy="502920"/>
           </a:xfrm>
           <a:prstGeom prst="rect">
             <a:avLst/>
@@ -11616,14 +11849,14 @@
           <a:noFill/>
         </p:spPr>
         <p:txBody>
-          <a:bodyPr wrap="square" lIns="45720" rIns="45720" tIns="18288" bIns="18288">
-            <a:spAutoFit/>
+          <a:bodyPr wrap="square" anchor="ctr" lIns="0" rIns="0" tIns="0" bIns="0">
+            <a:noAutofit/>
           </a:bodyPr>
           <a:lstStyle/>
           <a:p>
             <a:pPr algn="l"/>
             <a:r>
-              <a:rPr sz="2200" b="1">
+              <a:rPr sz="2000" b="1" i="0">
                 <a:solidFill>
                   <a:srgbClr val="C0392B"/>
                 </a:solidFill>
@@ -11641,8 +11874,8 @@
         </p:nvSpPr>
         <p:spPr>
           <a:xfrm>
-            <a:off x="640080" y="2286000"/>
-            <a:ext cx="10911535" cy="4069080"/>
+            <a:off x="640080" y="2148840"/>
+            <a:ext cx="10911535" cy="4114800"/>
           </a:xfrm>
           <a:prstGeom prst="rect">
             <a:avLst/>
@@ -11650,15 +11883,18 @@
           <a:noFill/>
         </p:spPr>
         <p:txBody>
-          <a:bodyPr wrap="square" lIns="45720" rIns="45720">
-            <a:spAutoFit/>
+          <a:bodyPr wrap="square" anchor="t" lIns="0" rIns="0" tIns="0" bIns="0">
+            <a:noAutofit/>
           </a:bodyPr>
           <a:lstStyle/>
           <a:p>
             <a:pPr algn="l">
               <a:lnSpc>
-                <a:spcPct val="130000"/>
+                <a:spcPct val="135000"/>
               </a:lnSpc>
+              <a:spcAft>
+                <a:spcPts val="600"/>
+              </a:spcAft>
             </a:pPr>
             <a:r>
               <a:rPr sz="1800">
@@ -11672,8 +11908,11 @@
           <a:p>
             <a:pPr algn="l">
               <a:lnSpc>
-                <a:spcPct val="130000"/>
+                <a:spcPct val="135000"/>
               </a:lnSpc>
+              <a:spcAft>
+                <a:spcPts val="600"/>
+              </a:spcAft>
             </a:pPr>
             <a:r>
               <a:rPr sz="1800">
@@ -11687,8 +11926,11 @@
           <a:p>
             <a:pPr algn="l">
               <a:lnSpc>
-                <a:spcPct val="130000"/>
+                <a:spcPct val="135000"/>
               </a:lnSpc>
+              <a:spcAft>
+                <a:spcPts val="600"/>
+              </a:spcAft>
             </a:pPr>
             <a:r>
               <a:rPr sz="1800">
@@ -11702,8 +11944,11 @@
           <a:p>
             <a:pPr algn="l">
               <a:lnSpc>
-                <a:spcPct val="130000"/>
+                <a:spcPct val="135000"/>
               </a:lnSpc>
+              <a:spcAft>
+                <a:spcPts val="600"/>
+              </a:spcAft>
             </a:pPr>
             <a:r>
               <a:rPr sz="1800">
@@ -11742,8 +11987,8 @@
         </p:nvSpPr>
         <p:spPr>
           <a:xfrm>
-            <a:off x="457200" y="457200"/>
-            <a:ext cx="11277295" cy="822960"/>
+            <a:off x="457200" y="365760"/>
+            <a:ext cx="11277295" cy="914400"/>
           </a:xfrm>
           <a:prstGeom prst="rect">
             <a:avLst/>
@@ -11751,14 +11996,14 @@
           <a:noFill/>
         </p:spPr>
         <p:txBody>
-          <a:bodyPr wrap="square" lIns="45720" rIns="45720" tIns="18288" bIns="18288">
-            <a:spAutoFit/>
+          <a:bodyPr wrap="square" anchor="ctr" lIns="0" rIns="0" tIns="0" bIns="0">
+            <a:noAutofit/>
           </a:bodyPr>
           <a:lstStyle/>
           <a:p>
             <a:pPr algn="l"/>
             <a:r>
-              <a:rPr sz="3000" b="1">
+              <a:rPr sz="2800" b="1" i="0">
                 <a:solidFill>
                   <a:srgbClr val="1F4E78"/>
                 </a:solidFill>
@@ -11776,8 +12021,8 @@
         </p:nvSpPr>
         <p:spPr>
           <a:xfrm>
-            <a:off x="457200" y="1234440"/>
-            <a:ext cx="1828800" cy="36576"/>
+            <a:off x="457200" y="1298448"/>
+            <a:ext cx="2194560" cy="36576"/>
           </a:xfrm>
           <a:prstGeom prst="rect">
             <a:avLst/>
@@ -11819,8 +12064,8 @@
         </p:nvSpPr>
         <p:spPr>
           <a:xfrm>
-            <a:off x="457200" y="1463040"/>
-            <a:ext cx="11277295" cy="640080"/>
+            <a:off x="457200" y="1508760"/>
+            <a:ext cx="11277295" cy="502920"/>
           </a:xfrm>
           <a:prstGeom prst="rect">
             <a:avLst/>
@@ -11828,14 +12073,14 @@
           <a:noFill/>
         </p:spPr>
         <p:txBody>
-          <a:bodyPr wrap="square" lIns="45720" rIns="45720" tIns="18288" bIns="18288">
-            <a:spAutoFit/>
+          <a:bodyPr wrap="square" anchor="ctr" lIns="0" rIns="0" tIns="0" bIns="0">
+            <a:noAutofit/>
           </a:bodyPr>
           <a:lstStyle/>
           <a:p>
             <a:pPr algn="l"/>
             <a:r>
-              <a:rPr sz="2200" b="1">
+              <a:rPr sz="2000" b="1" i="0">
                 <a:solidFill>
                   <a:srgbClr val="C0392B"/>
                 </a:solidFill>
@@ -11853,8 +12098,8 @@
         </p:nvSpPr>
         <p:spPr>
           <a:xfrm>
-            <a:off x="640080" y="2286000"/>
-            <a:ext cx="10911535" cy="4069080"/>
+            <a:off x="640080" y="2148840"/>
+            <a:ext cx="10911535" cy="4114800"/>
           </a:xfrm>
           <a:prstGeom prst="rect">
             <a:avLst/>
@@ -11862,15 +12107,18 @@
           <a:noFill/>
         </p:spPr>
         <p:txBody>
-          <a:bodyPr wrap="square" lIns="45720" rIns="45720">
-            <a:spAutoFit/>
+          <a:bodyPr wrap="square" anchor="t" lIns="0" rIns="0" tIns="0" bIns="0">
+            <a:noAutofit/>
           </a:bodyPr>
           <a:lstStyle/>
           <a:p>
             <a:pPr algn="l">
               <a:lnSpc>
-                <a:spcPct val="130000"/>
+                <a:spcPct val="135000"/>
               </a:lnSpc>
+              <a:spcAft>
+                <a:spcPts val="600"/>
+              </a:spcAft>
             </a:pPr>
             <a:r>
               <a:rPr sz="1800">
@@ -11884,8 +12132,11 @@
           <a:p>
             <a:pPr algn="l">
               <a:lnSpc>
-                <a:spcPct val="130000"/>
+                <a:spcPct val="135000"/>
               </a:lnSpc>
+              <a:spcAft>
+                <a:spcPts val="600"/>
+              </a:spcAft>
             </a:pPr>
             <a:r>
               <a:rPr sz="1800">
@@ -11899,8 +12150,11 @@
           <a:p>
             <a:pPr algn="l">
               <a:lnSpc>
-                <a:spcPct val="130000"/>
+                <a:spcPct val="135000"/>
               </a:lnSpc>
+              <a:spcAft>
+                <a:spcPts val="600"/>
+              </a:spcAft>
             </a:pPr>
             <a:r>
               <a:rPr sz="1800">
@@ -11914,8 +12168,11 @@
           <a:p>
             <a:pPr algn="l">
               <a:lnSpc>
-                <a:spcPct val="130000"/>
+                <a:spcPct val="135000"/>
               </a:lnSpc>
+              <a:spcAft>
+                <a:spcPts val="600"/>
+              </a:spcAft>
             </a:pPr>
             <a:r>
               <a:rPr sz="1800">
@@ -11954,8 +12211,8 @@
         </p:nvSpPr>
         <p:spPr>
           <a:xfrm>
-            <a:off x="457200" y="457200"/>
-            <a:ext cx="11277295" cy="822960"/>
+            <a:off x="457200" y="365760"/>
+            <a:ext cx="11277295" cy="914400"/>
           </a:xfrm>
           <a:prstGeom prst="rect">
             <a:avLst/>
@@ -11963,14 +12220,14 @@
           <a:noFill/>
         </p:spPr>
         <p:txBody>
-          <a:bodyPr wrap="square" lIns="45720" rIns="45720" tIns="18288" bIns="18288">
-            <a:spAutoFit/>
+          <a:bodyPr wrap="square" anchor="ctr" lIns="0" rIns="0" tIns="0" bIns="0">
+            <a:noAutofit/>
           </a:bodyPr>
           <a:lstStyle/>
           <a:p>
             <a:pPr algn="l"/>
             <a:r>
-              <a:rPr sz="3000" b="1">
+              <a:rPr sz="2800" b="1" i="0">
                 <a:solidFill>
                   <a:srgbClr val="1F4E78"/>
                 </a:solidFill>
@@ -11988,8 +12245,8 @@
         </p:nvSpPr>
         <p:spPr>
           <a:xfrm>
-            <a:off x="457200" y="1234440"/>
-            <a:ext cx="1828800" cy="36576"/>
+            <a:off x="457200" y="1298448"/>
+            <a:ext cx="2194560" cy="36576"/>
           </a:xfrm>
           <a:prstGeom prst="rect">
             <a:avLst/>
@@ -12031,8 +12288,8 @@
         </p:nvSpPr>
         <p:spPr>
           <a:xfrm>
-            <a:off x="457200" y="1463040"/>
-            <a:ext cx="11277295" cy="640080"/>
+            <a:off x="457200" y="1508760"/>
+            <a:ext cx="11277295" cy="502920"/>
           </a:xfrm>
           <a:prstGeom prst="rect">
             <a:avLst/>
@@ -12040,14 +12297,14 @@
           <a:noFill/>
         </p:spPr>
         <p:txBody>
-          <a:bodyPr wrap="square" lIns="45720" rIns="45720" tIns="18288" bIns="18288">
-            <a:spAutoFit/>
+          <a:bodyPr wrap="square" anchor="ctr" lIns="0" rIns="0" tIns="0" bIns="0">
+            <a:noAutofit/>
           </a:bodyPr>
           <a:lstStyle/>
           <a:p>
             <a:pPr algn="l"/>
             <a:r>
-              <a:rPr sz="2200" b="1">
+              <a:rPr sz="2000" b="1" i="0">
                 <a:solidFill>
                   <a:srgbClr val="C0392B"/>
                 </a:solidFill>
@@ -12065,8 +12322,8 @@
         </p:nvSpPr>
         <p:spPr>
           <a:xfrm>
-            <a:off x="731520" y="2286000"/>
-            <a:ext cx="10728655" cy="3977640"/>
+            <a:off x="731520" y="2148840"/>
+            <a:ext cx="10728655" cy="4114800"/>
           </a:xfrm>
           <a:prstGeom prst="rect">
             <a:avLst/>
@@ -12074,8 +12331,8 @@
           <a:noFill/>
         </p:spPr>
         <p:txBody>
-          <a:bodyPr wrap="none" tIns="91440">
-            <a:spAutoFit/>
+          <a:bodyPr wrap="none" anchor="t" tIns="91440">
+            <a:noAutofit/>
           </a:bodyPr>
           <a:lstStyle/>
           <a:p>
@@ -12132,8 +12389,8 @@
         </p:nvSpPr>
         <p:spPr>
           <a:xfrm>
-            <a:off x="457200" y="457200"/>
-            <a:ext cx="11277295" cy="822960"/>
+            <a:off x="457200" y="365760"/>
+            <a:ext cx="11277295" cy="914400"/>
           </a:xfrm>
           <a:prstGeom prst="rect">
             <a:avLst/>
@@ -12141,14 +12398,14 @@
           <a:noFill/>
         </p:spPr>
         <p:txBody>
-          <a:bodyPr wrap="square" lIns="45720" rIns="45720" tIns="18288" bIns="18288">
-            <a:spAutoFit/>
+          <a:bodyPr wrap="square" anchor="ctr" lIns="0" rIns="0" tIns="0" bIns="0">
+            <a:noAutofit/>
           </a:bodyPr>
           <a:lstStyle/>
           <a:p>
             <a:pPr algn="l"/>
             <a:r>
-              <a:rPr sz="3000" b="1">
+              <a:rPr sz="2800" b="1" i="0">
                 <a:solidFill>
                   <a:srgbClr val="1F4E78"/>
                 </a:solidFill>
@@ -12166,8 +12423,8 @@
         </p:nvSpPr>
         <p:spPr>
           <a:xfrm>
-            <a:off x="457200" y="1234440"/>
-            <a:ext cx="1828800" cy="36576"/>
+            <a:off x="457200" y="1298448"/>
+            <a:ext cx="2194560" cy="36576"/>
           </a:xfrm>
           <a:prstGeom prst="rect">
             <a:avLst/>
@@ -12209,8 +12466,8 @@
         </p:nvSpPr>
         <p:spPr>
           <a:xfrm>
-            <a:off x="457200" y="1463040"/>
-            <a:ext cx="11277295" cy="640080"/>
+            <a:off x="457200" y="1508760"/>
+            <a:ext cx="11277295" cy="502920"/>
           </a:xfrm>
           <a:prstGeom prst="rect">
             <a:avLst/>
@@ -12218,14 +12475,14 @@
           <a:noFill/>
         </p:spPr>
         <p:txBody>
-          <a:bodyPr wrap="square" lIns="45720" rIns="45720" tIns="18288" bIns="18288">
-            <a:spAutoFit/>
+          <a:bodyPr wrap="square" anchor="ctr" lIns="0" rIns="0" tIns="0" bIns="0">
+            <a:noAutofit/>
           </a:bodyPr>
           <a:lstStyle/>
           <a:p>
             <a:pPr algn="l"/>
             <a:r>
-              <a:rPr sz="2200" b="1">
+              <a:rPr sz="2000" b="1" i="0">
                 <a:solidFill>
                   <a:srgbClr val="C0392B"/>
                 </a:solidFill>
@@ -12244,7 +12501,7 @@
           <p:nvPr/>
         </p:nvGraphicFramePr>
         <p:xfrm>
-          <a:off x="457200" y="2286000"/>
+          <a:off x="457200" y="2148840"/>
           <a:ext cx="11277295" cy="2743200"/>
         </p:xfrm>
         <a:graphic>
@@ -12696,8 +12953,8 @@
         </p:nvSpPr>
         <p:spPr>
           <a:xfrm>
-            <a:off x="457200" y="457200"/>
-            <a:ext cx="11277295" cy="822960"/>
+            <a:off x="457200" y="365760"/>
+            <a:ext cx="11277295" cy="914400"/>
           </a:xfrm>
           <a:prstGeom prst="rect">
             <a:avLst/>
@@ -12705,14 +12962,14 @@
           <a:noFill/>
         </p:spPr>
         <p:txBody>
-          <a:bodyPr wrap="square" lIns="45720" rIns="45720" tIns="18288" bIns="18288">
-            <a:spAutoFit/>
+          <a:bodyPr wrap="square" anchor="ctr" lIns="0" rIns="0" tIns="0" bIns="0">
+            <a:noAutofit/>
           </a:bodyPr>
           <a:lstStyle/>
           <a:p>
             <a:pPr algn="l"/>
             <a:r>
-              <a:rPr sz="3000" b="1">
+              <a:rPr sz="2800" b="1" i="0">
                 <a:solidFill>
                   <a:srgbClr val="1F4E78"/>
                 </a:solidFill>
@@ -12730,8 +12987,8 @@
         </p:nvSpPr>
         <p:spPr>
           <a:xfrm>
-            <a:off x="457200" y="1234440"/>
-            <a:ext cx="1828800" cy="36576"/>
+            <a:off x="457200" y="1298448"/>
+            <a:ext cx="2194560" cy="36576"/>
           </a:xfrm>
           <a:prstGeom prst="rect">
             <a:avLst/>
@@ -12773,8 +13030,8 @@
         </p:nvSpPr>
         <p:spPr>
           <a:xfrm>
-            <a:off x="822960" y="1463040"/>
-            <a:ext cx="10545775" cy="4892040"/>
+            <a:off x="822960" y="2148840"/>
+            <a:ext cx="10545775" cy="4114800"/>
           </a:xfrm>
           <a:prstGeom prst="rect">
             <a:avLst/>
@@ -12782,15 +13039,18 @@
           <a:noFill/>
         </p:spPr>
         <p:txBody>
-          <a:bodyPr wrap="square" lIns="45720" rIns="45720">
-            <a:spAutoFit/>
+          <a:bodyPr wrap="square" anchor="t" lIns="0" rIns="0" tIns="0" bIns="0">
+            <a:noAutofit/>
           </a:bodyPr>
           <a:lstStyle/>
           <a:p>
             <a:pPr algn="l">
               <a:lnSpc>
-                <a:spcPct val="130000"/>
+                <a:spcPct val="135000"/>
               </a:lnSpc>
+              <a:spcAft>
+                <a:spcPts val="600"/>
+              </a:spcAft>
             </a:pPr>
             <a:r>
               <a:rPr sz="2200">
@@ -12804,8 +13064,11 @@
           <a:p>
             <a:pPr algn="l">
               <a:lnSpc>
-                <a:spcPct val="130000"/>
+                <a:spcPct val="135000"/>
               </a:lnSpc>
+              <a:spcAft>
+                <a:spcPts val="600"/>
+              </a:spcAft>
             </a:pPr>
             <a:r>
               <a:rPr sz="2200">
@@ -12819,8 +13082,11 @@
           <a:p>
             <a:pPr algn="l">
               <a:lnSpc>
-                <a:spcPct val="130000"/>
+                <a:spcPct val="135000"/>
               </a:lnSpc>
+              <a:spcAft>
+                <a:spcPts val="600"/>
+              </a:spcAft>
             </a:pPr>
             <a:r>
               <a:rPr sz="2200">
@@ -12834,8 +13100,11 @@
           <a:p>
             <a:pPr algn="l">
               <a:lnSpc>
-                <a:spcPct val="130000"/>
+                <a:spcPct val="135000"/>
               </a:lnSpc>
+              <a:spcAft>
+                <a:spcPts val="600"/>
+              </a:spcAft>
             </a:pPr>
             <a:r>
               <a:rPr sz="2200">
@@ -12849,8 +13118,11 @@
           <a:p>
             <a:pPr algn="l">
               <a:lnSpc>
-                <a:spcPct val="130000"/>
+                <a:spcPct val="135000"/>
               </a:lnSpc>
+              <a:spcAft>
+                <a:spcPts val="600"/>
+              </a:spcAft>
             </a:pPr>
             <a:r>
               <a:rPr sz="2200">
@@ -12864,8 +13136,11 @@
           <a:p>
             <a:pPr algn="l">
               <a:lnSpc>
-                <a:spcPct val="130000"/>
+                <a:spcPct val="135000"/>
               </a:lnSpc>
+              <a:spcAft>
+                <a:spcPts val="600"/>
+              </a:spcAft>
             </a:pPr>
             <a:r>
               <a:rPr sz="2200">
@@ -12956,14 +13231,14 @@
           <a:noFill/>
         </p:spPr>
         <p:txBody>
-          <a:bodyPr wrap="square" lIns="45720" rIns="45720" tIns="18288" bIns="18288">
-            <a:spAutoFit/>
+          <a:bodyPr wrap="square" anchor="ctr" lIns="0" rIns="0" tIns="0" bIns="0">
+            <a:noAutofit/>
           </a:bodyPr>
           <a:lstStyle/>
           <a:p>
             <a:pPr algn="ctr"/>
             <a:r>
-              <a:rPr sz="5800" b="1">
+              <a:rPr sz="5800" b="1" i="0">
                 <a:solidFill>
                   <a:srgbClr val="FFFFFF"/>
                 </a:solidFill>
@@ -12999,8 +13274,8 @@
         </p:nvSpPr>
         <p:spPr>
           <a:xfrm>
-            <a:off x="457200" y="457200"/>
-            <a:ext cx="11277295" cy="822960"/>
+            <a:off x="457200" y="365760"/>
+            <a:ext cx="11277295" cy="914400"/>
           </a:xfrm>
           <a:prstGeom prst="rect">
             <a:avLst/>
@@ -13008,14 +13283,14 @@
           <a:noFill/>
         </p:spPr>
         <p:txBody>
-          <a:bodyPr wrap="square" lIns="45720" rIns="45720" tIns="18288" bIns="18288">
-            <a:spAutoFit/>
+          <a:bodyPr wrap="square" anchor="ctr" lIns="0" rIns="0" tIns="0" bIns="0">
+            <a:noAutofit/>
           </a:bodyPr>
           <a:lstStyle/>
           <a:p>
             <a:pPr algn="l"/>
             <a:r>
-              <a:rPr sz="3000" b="1">
+              <a:rPr sz="2800" b="1" i="0">
                 <a:solidFill>
                   <a:srgbClr val="1F4E78"/>
                 </a:solidFill>
@@ -13033,8 +13308,8 @@
         </p:nvSpPr>
         <p:spPr>
           <a:xfrm>
-            <a:off x="457200" y="1234440"/>
-            <a:ext cx="1828800" cy="36576"/>
+            <a:off x="457200" y="1298448"/>
+            <a:ext cx="2194560" cy="36576"/>
           </a:xfrm>
           <a:prstGeom prst="rect">
             <a:avLst/>
@@ -13076,8 +13351,8 @@
         </p:nvSpPr>
         <p:spPr>
           <a:xfrm>
-            <a:off x="457200" y="1463040"/>
-            <a:ext cx="11277295" cy="640080"/>
+            <a:off x="457200" y="1508760"/>
+            <a:ext cx="11277295" cy="502920"/>
           </a:xfrm>
           <a:prstGeom prst="rect">
             <a:avLst/>
@@ -13085,14 +13360,14 @@
           <a:noFill/>
         </p:spPr>
         <p:txBody>
-          <a:bodyPr wrap="square" lIns="45720" rIns="45720" tIns="18288" bIns="18288">
-            <a:spAutoFit/>
+          <a:bodyPr wrap="square" anchor="ctr" lIns="0" rIns="0" tIns="0" bIns="0">
+            <a:noAutofit/>
           </a:bodyPr>
           <a:lstStyle/>
           <a:p>
             <a:pPr algn="l"/>
             <a:r>
-              <a:rPr sz="2200" b="1">
+              <a:rPr sz="2000" b="1" i="0">
                 <a:solidFill>
                   <a:srgbClr val="C0392B"/>
                 </a:solidFill>
@@ -13111,7 +13386,7 @@
           <p:nvPr/>
         </p:nvGraphicFramePr>
         <p:xfrm>
-          <a:off x="457200" y="2286000"/>
+          <a:off x="457200" y="2148840"/>
           <a:ext cx="11277295" cy="3657600"/>
         </p:xfrm>
         <a:graphic>
@@ -13522,8 +13797,8 @@
         </p:nvSpPr>
         <p:spPr>
           <a:xfrm>
-            <a:off x="457200" y="457200"/>
-            <a:ext cx="11277295" cy="822960"/>
+            <a:off x="457200" y="365760"/>
+            <a:ext cx="11277295" cy="914400"/>
           </a:xfrm>
           <a:prstGeom prst="rect">
             <a:avLst/>
@@ -13531,14 +13806,14 @@
           <a:noFill/>
         </p:spPr>
         <p:txBody>
-          <a:bodyPr wrap="square" lIns="45720" rIns="45720" tIns="18288" bIns="18288">
-            <a:spAutoFit/>
+          <a:bodyPr wrap="square" anchor="ctr" lIns="0" rIns="0" tIns="0" bIns="0">
+            <a:noAutofit/>
           </a:bodyPr>
           <a:lstStyle/>
           <a:p>
             <a:pPr algn="l"/>
             <a:r>
-              <a:rPr sz="3000" b="1">
+              <a:rPr sz="2800" b="1" i="0">
                 <a:solidFill>
                   <a:srgbClr val="1F4E78"/>
                 </a:solidFill>
@@ -13556,8 +13831,8 @@
         </p:nvSpPr>
         <p:spPr>
           <a:xfrm>
-            <a:off x="457200" y="1234440"/>
-            <a:ext cx="1828800" cy="36576"/>
+            <a:off x="457200" y="1298448"/>
+            <a:ext cx="2194560" cy="36576"/>
           </a:xfrm>
           <a:prstGeom prst="rect">
             <a:avLst/>
@@ -13599,8 +13874,8 @@
         </p:nvSpPr>
         <p:spPr>
           <a:xfrm>
-            <a:off x="457200" y="1463040"/>
-            <a:ext cx="11277295" cy="640080"/>
+            <a:off x="457200" y="1508760"/>
+            <a:ext cx="11277295" cy="502920"/>
           </a:xfrm>
           <a:prstGeom prst="rect">
             <a:avLst/>
@@ -13608,14 +13883,14 @@
           <a:noFill/>
         </p:spPr>
         <p:txBody>
-          <a:bodyPr wrap="square" lIns="45720" rIns="45720" tIns="18288" bIns="18288">
-            <a:spAutoFit/>
+          <a:bodyPr wrap="square" anchor="ctr" lIns="0" rIns="0" tIns="0" bIns="0">
+            <a:noAutofit/>
           </a:bodyPr>
           <a:lstStyle/>
           <a:p>
             <a:pPr algn="l"/>
             <a:r>
-              <a:rPr sz="2200" b="1">
+              <a:rPr sz="2000" b="1" i="0">
                 <a:solidFill>
                   <a:srgbClr val="C0392B"/>
                 </a:solidFill>
@@ -13633,8 +13908,8 @@
         </p:nvSpPr>
         <p:spPr>
           <a:xfrm>
-            <a:off x="640080" y="2286000"/>
-            <a:ext cx="10911535" cy="4069080"/>
+            <a:off x="640080" y="2148840"/>
+            <a:ext cx="10911535" cy="4114800"/>
           </a:xfrm>
           <a:prstGeom prst="rect">
             <a:avLst/>
@@ -13642,15 +13917,18 @@
           <a:noFill/>
         </p:spPr>
         <p:txBody>
-          <a:bodyPr wrap="square" lIns="45720" rIns="45720">
-            <a:spAutoFit/>
+          <a:bodyPr wrap="square" anchor="t" lIns="0" rIns="0" tIns="0" bIns="0">
+            <a:noAutofit/>
           </a:bodyPr>
           <a:lstStyle/>
           <a:p>
             <a:pPr algn="l">
               <a:lnSpc>
-                <a:spcPct val="130000"/>
+                <a:spcPct val="135000"/>
               </a:lnSpc>
+              <a:spcAft>
+                <a:spcPts val="600"/>
+              </a:spcAft>
             </a:pPr>
             <a:r>
               <a:rPr sz="1800">
@@ -13664,8 +13942,11 @@
           <a:p>
             <a:pPr algn="l">
               <a:lnSpc>
-                <a:spcPct val="130000"/>
+                <a:spcPct val="135000"/>
               </a:lnSpc>
+              <a:spcAft>
+                <a:spcPts val="600"/>
+              </a:spcAft>
             </a:pPr>
             <a:r>
               <a:rPr sz="1800">
@@ -13679,8 +13960,11 @@
           <a:p>
             <a:pPr algn="l">
               <a:lnSpc>
-                <a:spcPct val="130000"/>
+                <a:spcPct val="135000"/>
               </a:lnSpc>
+              <a:spcAft>
+                <a:spcPts val="600"/>
+              </a:spcAft>
             </a:pPr>
             <a:r>
               <a:rPr sz="1800">
